--- a/神羔羊配得.pptx
+++ b/神羔羊配得.pptx
@@ -2,19 +2,23 @@
 <file path=ppt/presentation.xml><?xml version="1.0" encoding="utf-8"?>
 <p:presentation xmlns:a="http://schemas.openxmlformats.org/drawingml/2006/main" xmlns:r="http://schemas.openxmlformats.org/officeDocument/2006/relationships" xmlns:p="http://schemas.openxmlformats.org/presentationml/2006/main" saveSubsetFonts="1">
   <p:sldMasterIdLst>
-    <p:sldMasterId id="2147483648" r:id="rId1"/>
+    <p:sldMasterId id="2147483660" r:id="rId1"/>
   </p:sldMasterIdLst>
   <p:sldIdLst>
-    <p:sldId id="256" r:id="rId2"/>
-    <p:sldId id="257" r:id="rId3"/>
-    <p:sldId id="258" r:id="rId4"/>
-    <p:sldId id="259" r:id="rId5"/>
+    <p:sldId id="391" r:id="rId2"/>
+    <p:sldId id="392" r:id="rId3"/>
+    <p:sldId id="393" r:id="rId4"/>
+    <p:sldId id="394" r:id="rId5"/>
+    <p:sldId id="395" r:id="rId6"/>
+    <p:sldId id="396" r:id="rId7"/>
+    <p:sldId id="397" r:id="rId8"/>
+    <p:sldId id="398" r:id="rId9"/>
   </p:sldIdLst>
-  <p:sldSz cx="9144000" cy="6858000" type="screen4x3"/>
+  <p:sldSz cx="12192000" cy="6858000"/>
   <p:notesSz cx="6858000" cy="9144000"/>
   <p:defaultTextStyle>
     <a:defPPr>
-      <a:defRPr lang="zh-TW"/>
+      <a:defRPr lang="vi-VN"/>
     </a:defPPr>
     <a:lvl1pPr marL="0" algn="l" defTabSz="914400" rtl="0" eaLnBrk="1" latinLnBrk="0" hangingPunct="1">
       <a:defRPr sz="1800" kern="1200">
@@ -107,6 +111,22 @@
       </a:defRPr>
     </a:lvl9pPr>
   </p:defaultTextStyle>
+  <p:extLst>
+    <p:ext uri="{EFAFB233-063F-42B5-8137-9DF3F51BA10A}">
+      <p15:sldGuideLst xmlns:p15="http://schemas.microsoft.com/office/powerpoint/2012/main">
+        <p15:guide id="1" orient="horz" pos="2160" userDrawn="1">
+          <p15:clr>
+            <a:srgbClr val="A4A3A4"/>
+          </p15:clr>
+        </p15:guide>
+        <p15:guide id="2" pos="3840" userDrawn="1">
+          <p15:clr>
+            <a:srgbClr val="A4A3A4"/>
+          </p15:clr>
+        </p15:guide>
+      </p15:sldGuideLst>
+    </p:ext>
+  </p:extLst>
 </p:presentation>
 </file>
 
@@ -139,8 +159,8 @@
         </p:nvSpPr>
         <p:spPr>
           <a:xfrm>
-            <a:off x="685800" y="2130425"/>
-            <a:ext cx="7772400" cy="1470025"/>
+            <a:off x="914400" y="2130430"/>
+            <a:ext cx="10363200" cy="1470025"/>
           </a:xfrm>
         </p:spPr>
         <p:txBody>
@@ -148,8 +168,8 @@
           <a:lstStyle/>
           <a:p>
             <a:r>
-              <a:rPr lang="zh-TW" altLang="en-US" smtClean="0"/>
-              <a:t>按一下以編輯母片標題樣式</a:t>
+              <a:rPr lang="en-US" altLang="zh-TW"/>
+              <a:t>Click to edit Master title style</a:t>
             </a:r>
             <a:endParaRPr lang="zh-TW" altLang="en-US"/>
           </a:p>
@@ -167,8 +187,8 @@
         </p:nvSpPr>
         <p:spPr>
           <a:xfrm>
-            <a:off x="1371600" y="3886200"/>
-            <a:ext cx="6400800" cy="1752600"/>
+            <a:off x="1828800" y="3886200"/>
+            <a:ext cx="8534400" cy="1752600"/>
           </a:xfrm>
         </p:spPr>
         <p:txBody>
@@ -184,7 +204,7 @@
                 </a:solidFill>
               </a:defRPr>
             </a:lvl1pPr>
-            <a:lvl2pPr marL="457200" indent="0" algn="ctr">
+            <a:lvl2pPr marL="457189" indent="0" algn="ctr">
               <a:buNone/>
               <a:defRPr>
                 <a:solidFill>
@@ -194,7 +214,7 @@
                 </a:solidFill>
               </a:defRPr>
             </a:lvl2pPr>
-            <a:lvl3pPr marL="914400" indent="0" algn="ctr">
+            <a:lvl3pPr marL="914378" indent="0" algn="ctr">
               <a:buNone/>
               <a:defRPr>
                 <a:solidFill>
@@ -204,7 +224,7 @@
                 </a:solidFill>
               </a:defRPr>
             </a:lvl3pPr>
-            <a:lvl4pPr marL="1371600" indent="0" algn="ctr">
+            <a:lvl4pPr marL="1371566" indent="0" algn="ctr">
               <a:buNone/>
               <a:defRPr>
                 <a:solidFill>
@@ -214,7 +234,7 @@
                 </a:solidFill>
               </a:defRPr>
             </a:lvl4pPr>
-            <a:lvl5pPr marL="1828800" indent="0" algn="ctr">
+            <a:lvl5pPr marL="1828754" indent="0" algn="ctr">
               <a:buNone/>
               <a:defRPr>
                 <a:solidFill>
@@ -224,7 +244,7 @@
                 </a:solidFill>
               </a:defRPr>
             </a:lvl5pPr>
-            <a:lvl6pPr marL="2286000" indent="0" algn="ctr">
+            <a:lvl6pPr marL="2285943" indent="0" algn="ctr">
               <a:buNone/>
               <a:defRPr>
                 <a:solidFill>
@@ -234,7 +254,7 @@
                 </a:solidFill>
               </a:defRPr>
             </a:lvl6pPr>
-            <a:lvl7pPr marL="2743200" indent="0" algn="ctr">
+            <a:lvl7pPr marL="2743132" indent="0" algn="ctr">
               <a:buNone/>
               <a:defRPr>
                 <a:solidFill>
@@ -244,7 +264,7 @@
                 </a:solidFill>
               </a:defRPr>
             </a:lvl7pPr>
-            <a:lvl8pPr marL="3200400" indent="0" algn="ctr">
+            <a:lvl8pPr marL="3200320" indent="0" algn="ctr">
               <a:buNone/>
               <a:defRPr>
                 <a:solidFill>
@@ -254,7 +274,7 @@
                 </a:solidFill>
               </a:defRPr>
             </a:lvl8pPr>
-            <a:lvl9pPr marL="3657600" indent="0" algn="ctr">
+            <a:lvl9pPr marL="3657509" indent="0" algn="ctr">
               <a:buNone/>
               <a:defRPr>
                 <a:solidFill>
@@ -267,8 +287,8 @@
           </a:lstStyle>
           <a:p>
             <a:r>
-              <a:rPr lang="zh-TW" altLang="en-US" smtClean="0"/>
-              <a:t>按一下以編輯母片副標題樣式</a:t>
+              <a:rPr lang="en-US" altLang="zh-TW"/>
+              <a:t>Click to edit Master subtitle style</a:t>
             </a:r>
             <a:endParaRPr lang="zh-TW" altLang="en-US"/>
           </a:p>
@@ -291,7 +311,7 @@
           <a:p>
             <a:fld id="{0FFEF273-F592-4256-8BF3-017BE16D08B7}" type="datetimeFigureOut">
               <a:rPr lang="zh-TW" altLang="en-US" smtClean="0"/>
-              <a:t>2020/6/12</a:t>
+              <a:t>2025/10/17</a:t>
             </a:fld>
             <a:endParaRPr lang="zh-TW" altLang="en-US"/>
           </a:p>
@@ -340,6 +360,11 @@
         </p:txBody>
       </p:sp>
     </p:spTree>
+    <p:extLst>
+      <p:ext uri="{BB962C8B-B14F-4D97-AF65-F5344CB8AC3E}">
+        <p14:creationId xmlns:p14="http://schemas.microsoft.com/office/powerpoint/2010/main" val="3672085548"/>
+      </p:ext>
+    </p:extLst>
   </p:cSld>
   <p:clrMapOvr>
     <a:masterClrMapping/>
@@ -380,8 +405,8 @@
           <a:lstStyle/>
           <a:p>
             <a:r>
-              <a:rPr lang="zh-TW" altLang="en-US" smtClean="0"/>
-              <a:t>按一下以編輯母片標題樣式</a:t>
+              <a:rPr lang="en-US" altLang="zh-TW"/>
+              <a:t>Click to edit Master title style</a:t>
             </a:r>
             <a:endParaRPr lang="zh-TW" altLang="en-US"/>
           </a:p>
@@ -404,36 +429,36 @@
           <a:p>
             <a:pPr lvl="0"/>
             <a:r>
-              <a:rPr lang="zh-TW" altLang="en-US" smtClean="0"/>
-              <a:t>按一下以編輯母片文字樣式</a:t>
+              <a:rPr lang="en-US" altLang="zh-TW"/>
+              <a:t>Click to edit Master text styles</a:t>
             </a:r>
           </a:p>
           <a:p>
             <a:pPr lvl="1"/>
             <a:r>
-              <a:rPr lang="zh-TW" altLang="en-US" smtClean="0"/>
-              <a:t>第二層</a:t>
+              <a:rPr lang="en-US" altLang="zh-TW"/>
+              <a:t>Second level</a:t>
             </a:r>
           </a:p>
           <a:p>
             <a:pPr lvl="2"/>
             <a:r>
-              <a:rPr lang="zh-TW" altLang="en-US" smtClean="0"/>
-              <a:t>第三層</a:t>
+              <a:rPr lang="en-US" altLang="zh-TW"/>
+              <a:t>Third level</a:t>
             </a:r>
           </a:p>
           <a:p>
             <a:pPr lvl="3"/>
             <a:r>
-              <a:rPr lang="zh-TW" altLang="en-US" smtClean="0"/>
-              <a:t>第四層</a:t>
+              <a:rPr lang="en-US" altLang="zh-TW"/>
+              <a:t>Fourth level</a:t>
             </a:r>
           </a:p>
           <a:p>
             <a:pPr lvl="4"/>
             <a:r>
-              <a:rPr lang="zh-TW" altLang="en-US" smtClean="0"/>
-              <a:t>第五層</a:t>
+              <a:rPr lang="en-US" altLang="zh-TW"/>
+              <a:t>Fifth level</a:t>
             </a:r>
             <a:endParaRPr lang="zh-TW" altLang="en-US"/>
           </a:p>
@@ -456,7 +481,7 @@
           <a:p>
             <a:fld id="{0FFEF273-F592-4256-8BF3-017BE16D08B7}" type="datetimeFigureOut">
               <a:rPr lang="zh-TW" altLang="en-US" smtClean="0"/>
-              <a:t>2020/6/12</a:t>
+              <a:t>2025/10/17</a:t>
             </a:fld>
             <a:endParaRPr lang="zh-TW" altLang="en-US"/>
           </a:p>
@@ -505,6 +530,11 @@
         </p:txBody>
       </p:sp>
     </p:spTree>
+    <p:extLst>
+      <p:ext uri="{BB962C8B-B14F-4D97-AF65-F5344CB8AC3E}">
+        <p14:creationId xmlns:p14="http://schemas.microsoft.com/office/powerpoint/2010/main" val="1835261236"/>
+      </p:ext>
+    </p:extLst>
   </p:cSld>
   <p:clrMapOvr>
     <a:masterClrMapping/>
@@ -541,8 +571,8 @@
         </p:nvSpPr>
         <p:spPr>
           <a:xfrm>
-            <a:off x="6629400" y="274638"/>
-            <a:ext cx="2057400" cy="5851525"/>
+            <a:off x="8839200" y="274641"/>
+            <a:ext cx="2743200" cy="5851525"/>
           </a:xfrm>
         </p:spPr>
         <p:txBody>
@@ -550,8 +580,8 @@
           <a:lstStyle/>
           <a:p>
             <a:r>
-              <a:rPr lang="zh-TW" altLang="en-US" smtClean="0"/>
-              <a:t>按一下以編輯母片標題樣式</a:t>
+              <a:rPr lang="en-US" altLang="zh-TW"/>
+              <a:t>Click to edit Master title style</a:t>
             </a:r>
             <a:endParaRPr lang="zh-TW" altLang="en-US"/>
           </a:p>
@@ -569,8 +599,8 @@
         </p:nvSpPr>
         <p:spPr>
           <a:xfrm>
-            <a:off x="457200" y="274638"/>
-            <a:ext cx="6019800" cy="5851525"/>
+            <a:off x="609600" y="274641"/>
+            <a:ext cx="8026400" cy="5851525"/>
           </a:xfrm>
         </p:spPr>
         <p:txBody>
@@ -579,36 +609,36 @@
           <a:p>
             <a:pPr lvl="0"/>
             <a:r>
-              <a:rPr lang="zh-TW" altLang="en-US" smtClean="0"/>
-              <a:t>按一下以編輯母片文字樣式</a:t>
+              <a:rPr lang="en-US" altLang="zh-TW"/>
+              <a:t>Click to edit Master text styles</a:t>
             </a:r>
           </a:p>
           <a:p>
             <a:pPr lvl="1"/>
             <a:r>
-              <a:rPr lang="zh-TW" altLang="en-US" smtClean="0"/>
-              <a:t>第二層</a:t>
+              <a:rPr lang="en-US" altLang="zh-TW"/>
+              <a:t>Second level</a:t>
             </a:r>
           </a:p>
           <a:p>
             <a:pPr lvl="2"/>
             <a:r>
-              <a:rPr lang="zh-TW" altLang="en-US" smtClean="0"/>
-              <a:t>第三層</a:t>
+              <a:rPr lang="en-US" altLang="zh-TW"/>
+              <a:t>Third level</a:t>
             </a:r>
           </a:p>
           <a:p>
             <a:pPr lvl="3"/>
             <a:r>
-              <a:rPr lang="zh-TW" altLang="en-US" smtClean="0"/>
-              <a:t>第四層</a:t>
+              <a:rPr lang="en-US" altLang="zh-TW"/>
+              <a:t>Fourth level</a:t>
             </a:r>
           </a:p>
           <a:p>
             <a:pPr lvl="4"/>
             <a:r>
-              <a:rPr lang="zh-TW" altLang="en-US" smtClean="0"/>
-              <a:t>第五層</a:t>
+              <a:rPr lang="en-US" altLang="zh-TW"/>
+              <a:t>Fifth level</a:t>
             </a:r>
             <a:endParaRPr lang="zh-TW" altLang="en-US"/>
           </a:p>
@@ -631,7 +661,7 @@
           <a:p>
             <a:fld id="{0FFEF273-F592-4256-8BF3-017BE16D08B7}" type="datetimeFigureOut">
               <a:rPr lang="zh-TW" altLang="en-US" smtClean="0"/>
-              <a:t>2020/6/12</a:t>
+              <a:t>2025/10/17</a:t>
             </a:fld>
             <a:endParaRPr lang="zh-TW" altLang="en-US"/>
           </a:p>
@@ -680,6 +710,11 @@
         </p:txBody>
       </p:sp>
     </p:spTree>
+    <p:extLst>
+      <p:ext uri="{BB962C8B-B14F-4D97-AF65-F5344CB8AC3E}">
+        <p14:creationId xmlns:p14="http://schemas.microsoft.com/office/powerpoint/2010/main" val="2001009880"/>
+      </p:ext>
+    </p:extLst>
   </p:cSld>
   <p:clrMapOvr>
     <a:masterClrMapping/>
@@ -720,8 +755,8 @@
           <a:lstStyle/>
           <a:p>
             <a:r>
-              <a:rPr lang="zh-TW" altLang="en-US" smtClean="0"/>
-              <a:t>按一下以編輯母片標題樣式</a:t>
+              <a:rPr lang="en-US" altLang="zh-TW"/>
+              <a:t>Click to edit Master title style</a:t>
             </a:r>
             <a:endParaRPr lang="zh-TW" altLang="en-US"/>
           </a:p>
@@ -744,36 +779,36 @@
           <a:p>
             <a:pPr lvl="0"/>
             <a:r>
-              <a:rPr lang="zh-TW" altLang="en-US" smtClean="0"/>
-              <a:t>按一下以編輯母片文字樣式</a:t>
+              <a:rPr lang="en-US" altLang="zh-TW"/>
+              <a:t>Click to edit Master text styles</a:t>
             </a:r>
           </a:p>
           <a:p>
             <a:pPr lvl="1"/>
             <a:r>
-              <a:rPr lang="zh-TW" altLang="en-US" smtClean="0"/>
-              <a:t>第二層</a:t>
+              <a:rPr lang="en-US" altLang="zh-TW"/>
+              <a:t>Second level</a:t>
             </a:r>
           </a:p>
           <a:p>
             <a:pPr lvl="2"/>
             <a:r>
-              <a:rPr lang="zh-TW" altLang="en-US" smtClean="0"/>
-              <a:t>第三層</a:t>
+              <a:rPr lang="en-US" altLang="zh-TW"/>
+              <a:t>Third level</a:t>
             </a:r>
           </a:p>
           <a:p>
             <a:pPr lvl="3"/>
             <a:r>
-              <a:rPr lang="zh-TW" altLang="en-US" smtClean="0"/>
-              <a:t>第四層</a:t>
+              <a:rPr lang="en-US" altLang="zh-TW"/>
+              <a:t>Fourth level</a:t>
             </a:r>
           </a:p>
           <a:p>
             <a:pPr lvl="4"/>
             <a:r>
-              <a:rPr lang="zh-TW" altLang="en-US" smtClean="0"/>
-              <a:t>第五層</a:t>
+              <a:rPr lang="en-US" altLang="zh-TW"/>
+              <a:t>Fifth level</a:t>
             </a:r>
             <a:endParaRPr lang="zh-TW" altLang="en-US"/>
           </a:p>
@@ -796,7 +831,7 @@
           <a:p>
             <a:fld id="{0FFEF273-F592-4256-8BF3-017BE16D08B7}" type="datetimeFigureOut">
               <a:rPr lang="zh-TW" altLang="en-US" smtClean="0"/>
-              <a:t>2020/6/12</a:t>
+              <a:t>2025/10/17</a:t>
             </a:fld>
             <a:endParaRPr lang="zh-TW" altLang="en-US"/>
           </a:p>
@@ -845,6 +880,11 @@
         </p:txBody>
       </p:sp>
     </p:spTree>
+    <p:extLst>
+      <p:ext uri="{BB962C8B-B14F-4D97-AF65-F5344CB8AC3E}">
+        <p14:creationId xmlns:p14="http://schemas.microsoft.com/office/powerpoint/2010/main" val="44726414"/>
+      </p:ext>
+    </p:extLst>
   </p:cSld>
   <p:clrMapOvr>
     <a:masterClrMapping/>
@@ -881,8 +921,8 @@
         </p:nvSpPr>
         <p:spPr>
           <a:xfrm>
-            <a:off x="722313" y="4406900"/>
-            <a:ext cx="7772400" cy="1362075"/>
+            <a:off x="963084" y="4406903"/>
+            <a:ext cx="10363200" cy="1362075"/>
           </a:xfrm>
         </p:spPr>
         <p:txBody>
@@ -894,8 +934,8 @@
           </a:lstStyle>
           <a:p>
             <a:r>
-              <a:rPr lang="zh-TW" altLang="en-US" smtClean="0"/>
-              <a:t>按一下以編輯母片標題樣式</a:t>
+              <a:rPr lang="en-US" altLang="zh-TW"/>
+              <a:t>Click to edit Master title style</a:t>
             </a:r>
             <a:endParaRPr lang="zh-TW" altLang="en-US"/>
           </a:p>
@@ -913,8 +953,8 @@
         </p:nvSpPr>
         <p:spPr>
           <a:xfrm>
-            <a:off x="722313" y="2906713"/>
-            <a:ext cx="7772400" cy="1500187"/>
+            <a:off x="963084" y="2906713"/>
+            <a:ext cx="10363200" cy="1500187"/>
           </a:xfrm>
         </p:spPr>
         <p:txBody>
@@ -930,7 +970,7 @@
                 </a:solidFill>
               </a:defRPr>
             </a:lvl1pPr>
-            <a:lvl2pPr marL="457200" indent="0">
+            <a:lvl2pPr marL="457189" indent="0">
               <a:buNone/>
               <a:defRPr sz="1800">
                 <a:solidFill>
@@ -940,7 +980,7 @@
                 </a:solidFill>
               </a:defRPr>
             </a:lvl2pPr>
-            <a:lvl3pPr marL="914400" indent="0">
+            <a:lvl3pPr marL="914378" indent="0">
               <a:buNone/>
               <a:defRPr sz="1600">
                 <a:solidFill>
@@ -950,7 +990,7 @@
                 </a:solidFill>
               </a:defRPr>
             </a:lvl3pPr>
-            <a:lvl4pPr marL="1371600" indent="0">
+            <a:lvl4pPr marL="1371566" indent="0">
               <a:buNone/>
               <a:defRPr sz="1400">
                 <a:solidFill>
@@ -960,7 +1000,7 @@
                 </a:solidFill>
               </a:defRPr>
             </a:lvl4pPr>
-            <a:lvl5pPr marL="1828800" indent="0">
+            <a:lvl5pPr marL="1828754" indent="0">
               <a:buNone/>
               <a:defRPr sz="1400">
                 <a:solidFill>
@@ -970,7 +1010,7 @@
                 </a:solidFill>
               </a:defRPr>
             </a:lvl5pPr>
-            <a:lvl6pPr marL="2286000" indent="0">
+            <a:lvl6pPr marL="2285943" indent="0">
               <a:buNone/>
               <a:defRPr sz="1400">
                 <a:solidFill>
@@ -980,7 +1020,7 @@
                 </a:solidFill>
               </a:defRPr>
             </a:lvl6pPr>
-            <a:lvl7pPr marL="2743200" indent="0">
+            <a:lvl7pPr marL="2743132" indent="0">
               <a:buNone/>
               <a:defRPr sz="1400">
                 <a:solidFill>
@@ -990,7 +1030,7 @@
                 </a:solidFill>
               </a:defRPr>
             </a:lvl7pPr>
-            <a:lvl8pPr marL="3200400" indent="0">
+            <a:lvl8pPr marL="3200320" indent="0">
               <a:buNone/>
               <a:defRPr sz="1400">
                 <a:solidFill>
@@ -1000,7 +1040,7 @@
                 </a:solidFill>
               </a:defRPr>
             </a:lvl8pPr>
-            <a:lvl9pPr marL="3657600" indent="0">
+            <a:lvl9pPr marL="3657509" indent="0">
               <a:buNone/>
               <a:defRPr sz="1400">
                 <a:solidFill>
@@ -1014,8 +1054,8 @@
           <a:p>
             <a:pPr lvl="0"/>
             <a:r>
-              <a:rPr lang="zh-TW" altLang="en-US" smtClean="0"/>
-              <a:t>按一下以編輯母片文字樣式</a:t>
+              <a:rPr lang="en-US" altLang="zh-TW"/>
+              <a:t>Click to edit Master text styles</a:t>
             </a:r>
           </a:p>
         </p:txBody>
@@ -1037,7 +1077,7 @@
           <a:p>
             <a:fld id="{0FFEF273-F592-4256-8BF3-017BE16D08B7}" type="datetimeFigureOut">
               <a:rPr lang="zh-TW" altLang="en-US" smtClean="0"/>
-              <a:t>2020/6/12</a:t>
+              <a:t>2025/10/17</a:t>
             </a:fld>
             <a:endParaRPr lang="zh-TW" altLang="en-US"/>
           </a:p>
@@ -1086,6 +1126,11 @@
         </p:txBody>
       </p:sp>
     </p:spTree>
+    <p:extLst>
+      <p:ext uri="{BB962C8B-B14F-4D97-AF65-F5344CB8AC3E}">
+        <p14:creationId xmlns:p14="http://schemas.microsoft.com/office/powerpoint/2010/main" val="1251281266"/>
+      </p:ext>
+    </p:extLst>
   </p:cSld>
   <p:clrMapOvr>
     <a:masterClrMapping/>
@@ -1126,8 +1171,8 @@
           <a:lstStyle/>
           <a:p>
             <a:r>
-              <a:rPr lang="zh-TW" altLang="en-US" smtClean="0"/>
-              <a:t>按一下以編輯母片標題樣式</a:t>
+              <a:rPr lang="en-US" altLang="zh-TW"/>
+              <a:t>Click to edit Master title style</a:t>
             </a:r>
             <a:endParaRPr lang="zh-TW" altLang="en-US"/>
           </a:p>
@@ -1145,8 +1190,8 @@
         </p:nvSpPr>
         <p:spPr>
           <a:xfrm>
-            <a:off x="457200" y="1600200"/>
-            <a:ext cx="4038600" cy="4525963"/>
+            <a:off x="609600" y="1600203"/>
+            <a:ext cx="5384800" cy="4525963"/>
           </a:xfrm>
         </p:spPr>
         <p:txBody>
@@ -1183,36 +1228,36 @@
           <a:p>
             <a:pPr lvl="0"/>
             <a:r>
-              <a:rPr lang="zh-TW" altLang="en-US" smtClean="0"/>
-              <a:t>按一下以編輯母片文字樣式</a:t>
+              <a:rPr lang="en-US" altLang="zh-TW"/>
+              <a:t>Click to edit Master text styles</a:t>
             </a:r>
           </a:p>
           <a:p>
             <a:pPr lvl="1"/>
             <a:r>
-              <a:rPr lang="zh-TW" altLang="en-US" smtClean="0"/>
-              <a:t>第二層</a:t>
+              <a:rPr lang="en-US" altLang="zh-TW"/>
+              <a:t>Second level</a:t>
             </a:r>
           </a:p>
           <a:p>
             <a:pPr lvl="2"/>
             <a:r>
-              <a:rPr lang="zh-TW" altLang="en-US" smtClean="0"/>
-              <a:t>第三層</a:t>
+              <a:rPr lang="en-US" altLang="zh-TW"/>
+              <a:t>Third level</a:t>
             </a:r>
           </a:p>
           <a:p>
             <a:pPr lvl="3"/>
             <a:r>
-              <a:rPr lang="zh-TW" altLang="en-US" smtClean="0"/>
-              <a:t>第四層</a:t>
+              <a:rPr lang="en-US" altLang="zh-TW"/>
+              <a:t>Fourth level</a:t>
             </a:r>
           </a:p>
           <a:p>
             <a:pPr lvl="4"/>
             <a:r>
-              <a:rPr lang="zh-TW" altLang="en-US" smtClean="0"/>
-              <a:t>第五層</a:t>
+              <a:rPr lang="en-US" altLang="zh-TW"/>
+              <a:t>Fifth level</a:t>
             </a:r>
             <a:endParaRPr lang="zh-TW" altLang="en-US"/>
           </a:p>
@@ -1230,8 +1275,8 @@
         </p:nvSpPr>
         <p:spPr>
           <a:xfrm>
-            <a:off x="4648200" y="1600200"/>
-            <a:ext cx="4038600" cy="4525963"/>
+            <a:off x="6197600" y="1600203"/>
+            <a:ext cx="5384800" cy="4525963"/>
           </a:xfrm>
         </p:spPr>
         <p:txBody>
@@ -1268,36 +1313,36 @@
           <a:p>
             <a:pPr lvl="0"/>
             <a:r>
-              <a:rPr lang="zh-TW" altLang="en-US" smtClean="0"/>
-              <a:t>按一下以編輯母片文字樣式</a:t>
+              <a:rPr lang="en-US" altLang="zh-TW"/>
+              <a:t>Click to edit Master text styles</a:t>
             </a:r>
           </a:p>
           <a:p>
             <a:pPr lvl="1"/>
             <a:r>
-              <a:rPr lang="zh-TW" altLang="en-US" smtClean="0"/>
-              <a:t>第二層</a:t>
+              <a:rPr lang="en-US" altLang="zh-TW"/>
+              <a:t>Second level</a:t>
             </a:r>
           </a:p>
           <a:p>
             <a:pPr lvl="2"/>
             <a:r>
-              <a:rPr lang="zh-TW" altLang="en-US" smtClean="0"/>
-              <a:t>第三層</a:t>
+              <a:rPr lang="en-US" altLang="zh-TW"/>
+              <a:t>Third level</a:t>
             </a:r>
           </a:p>
           <a:p>
             <a:pPr lvl="3"/>
             <a:r>
-              <a:rPr lang="zh-TW" altLang="en-US" smtClean="0"/>
-              <a:t>第四層</a:t>
+              <a:rPr lang="en-US" altLang="zh-TW"/>
+              <a:t>Fourth level</a:t>
             </a:r>
           </a:p>
           <a:p>
             <a:pPr lvl="4"/>
             <a:r>
-              <a:rPr lang="zh-TW" altLang="en-US" smtClean="0"/>
-              <a:t>第五層</a:t>
+              <a:rPr lang="en-US" altLang="zh-TW"/>
+              <a:t>Fifth level</a:t>
             </a:r>
             <a:endParaRPr lang="zh-TW" altLang="en-US"/>
           </a:p>
@@ -1320,7 +1365,7 @@
           <a:p>
             <a:fld id="{0FFEF273-F592-4256-8BF3-017BE16D08B7}" type="datetimeFigureOut">
               <a:rPr lang="zh-TW" altLang="en-US" smtClean="0"/>
-              <a:t>2020/6/12</a:t>
+              <a:t>2025/10/17</a:t>
             </a:fld>
             <a:endParaRPr lang="zh-TW" altLang="en-US"/>
           </a:p>
@@ -1369,6 +1414,11 @@
         </p:txBody>
       </p:sp>
     </p:spTree>
+    <p:extLst>
+      <p:ext uri="{BB962C8B-B14F-4D97-AF65-F5344CB8AC3E}">
+        <p14:creationId xmlns:p14="http://schemas.microsoft.com/office/powerpoint/2010/main" val="3260392966"/>
+      </p:ext>
+    </p:extLst>
   </p:cSld>
   <p:clrMapOvr>
     <a:masterClrMapping/>
@@ -1413,8 +1463,8 @@
           </a:lstStyle>
           <a:p>
             <a:r>
-              <a:rPr lang="zh-TW" altLang="en-US" smtClean="0"/>
-              <a:t>按一下以編輯母片標題樣式</a:t>
+              <a:rPr lang="en-US" altLang="zh-TW"/>
+              <a:t>Click to edit Master title style</a:t>
             </a:r>
             <a:endParaRPr lang="zh-TW" altLang="en-US"/>
           </a:p>
@@ -1432,8 +1482,8 @@
         </p:nvSpPr>
         <p:spPr>
           <a:xfrm>
-            <a:off x="457200" y="1535113"/>
-            <a:ext cx="4040188" cy="639762"/>
+            <a:off x="609600" y="1535115"/>
+            <a:ext cx="5386917" cy="639763"/>
           </a:xfrm>
         </p:spPr>
         <p:txBody>
@@ -1443,35 +1493,35 @@
               <a:buNone/>
               <a:defRPr sz="2400" b="1"/>
             </a:lvl1pPr>
-            <a:lvl2pPr marL="457200" indent="0">
+            <a:lvl2pPr marL="457189" indent="0">
               <a:buNone/>
               <a:defRPr sz="2000" b="1"/>
             </a:lvl2pPr>
-            <a:lvl3pPr marL="914400" indent="0">
+            <a:lvl3pPr marL="914378" indent="0">
               <a:buNone/>
               <a:defRPr sz="1800" b="1"/>
             </a:lvl3pPr>
-            <a:lvl4pPr marL="1371600" indent="0">
+            <a:lvl4pPr marL="1371566" indent="0">
               <a:buNone/>
               <a:defRPr sz="1600" b="1"/>
             </a:lvl4pPr>
-            <a:lvl5pPr marL="1828800" indent="0">
+            <a:lvl5pPr marL="1828754" indent="0">
               <a:buNone/>
               <a:defRPr sz="1600" b="1"/>
             </a:lvl5pPr>
-            <a:lvl6pPr marL="2286000" indent="0">
+            <a:lvl6pPr marL="2285943" indent="0">
               <a:buNone/>
               <a:defRPr sz="1600" b="1"/>
             </a:lvl6pPr>
-            <a:lvl7pPr marL="2743200" indent="0">
+            <a:lvl7pPr marL="2743132" indent="0">
               <a:buNone/>
               <a:defRPr sz="1600" b="1"/>
             </a:lvl7pPr>
-            <a:lvl8pPr marL="3200400" indent="0">
+            <a:lvl8pPr marL="3200320" indent="0">
               <a:buNone/>
               <a:defRPr sz="1600" b="1"/>
             </a:lvl8pPr>
-            <a:lvl9pPr marL="3657600" indent="0">
+            <a:lvl9pPr marL="3657509" indent="0">
               <a:buNone/>
               <a:defRPr sz="1600" b="1"/>
             </a:lvl9pPr>
@@ -1479,8 +1529,8 @@
           <a:p>
             <a:pPr lvl="0"/>
             <a:r>
-              <a:rPr lang="zh-TW" altLang="en-US" smtClean="0"/>
-              <a:t>按一下以編輯母片文字樣式</a:t>
+              <a:rPr lang="en-US" altLang="zh-TW"/>
+              <a:t>Click to edit Master text styles</a:t>
             </a:r>
           </a:p>
         </p:txBody>
@@ -1497,8 +1547,8 @@
         </p:nvSpPr>
         <p:spPr>
           <a:xfrm>
-            <a:off x="457200" y="2174875"/>
-            <a:ext cx="4040188" cy="3951288"/>
+            <a:off x="609600" y="2174875"/>
+            <a:ext cx="5386917" cy="3951288"/>
           </a:xfrm>
         </p:spPr>
         <p:txBody>
@@ -1535,36 +1585,36 @@
           <a:p>
             <a:pPr lvl="0"/>
             <a:r>
-              <a:rPr lang="zh-TW" altLang="en-US" smtClean="0"/>
-              <a:t>按一下以編輯母片文字樣式</a:t>
+              <a:rPr lang="en-US" altLang="zh-TW"/>
+              <a:t>Click to edit Master text styles</a:t>
             </a:r>
           </a:p>
           <a:p>
             <a:pPr lvl="1"/>
             <a:r>
-              <a:rPr lang="zh-TW" altLang="en-US" smtClean="0"/>
-              <a:t>第二層</a:t>
+              <a:rPr lang="en-US" altLang="zh-TW"/>
+              <a:t>Second level</a:t>
             </a:r>
           </a:p>
           <a:p>
             <a:pPr lvl="2"/>
             <a:r>
-              <a:rPr lang="zh-TW" altLang="en-US" smtClean="0"/>
-              <a:t>第三層</a:t>
+              <a:rPr lang="en-US" altLang="zh-TW"/>
+              <a:t>Third level</a:t>
             </a:r>
           </a:p>
           <a:p>
             <a:pPr lvl="3"/>
             <a:r>
-              <a:rPr lang="zh-TW" altLang="en-US" smtClean="0"/>
-              <a:t>第四層</a:t>
+              <a:rPr lang="en-US" altLang="zh-TW"/>
+              <a:t>Fourth level</a:t>
             </a:r>
           </a:p>
           <a:p>
             <a:pPr lvl="4"/>
             <a:r>
-              <a:rPr lang="zh-TW" altLang="en-US" smtClean="0"/>
-              <a:t>第五層</a:t>
+              <a:rPr lang="en-US" altLang="zh-TW"/>
+              <a:t>Fifth level</a:t>
             </a:r>
             <a:endParaRPr lang="zh-TW" altLang="en-US"/>
           </a:p>
@@ -1582,8 +1632,8 @@
         </p:nvSpPr>
         <p:spPr>
           <a:xfrm>
-            <a:off x="4645025" y="1535113"/>
-            <a:ext cx="4041775" cy="639762"/>
+            <a:off x="6193373" y="1535115"/>
+            <a:ext cx="5389033" cy="639763"/>
           </a:xfrm>
         </p:spPr>
         <p:txBody>
@@ -1593,35 +1643,35 @@
               <a:buNone/>
               <a:defRPr sz="2400" b="1"/>
             </a:lvl1pPr>
-            <a:lvl2pPr marL="457200" indent="0">
+            <a:lvl2pPr marL="457189" indent="0">
               <a:buNone/>
               <a:defRPr sz="2000" b="1"/>
             </a:lvl2pPr>
-            <a:lvl3pPr marL="914400" indent="0">
+            <a:lvl3pPr marL="914378" indent="0">
               <a:buNone/>
               <a:defRPr sz="1800" b="1"/>
             </a:lvl3pPr>
-            <a:lvl4pPr marL="1371600" indent="0">
+            <a:lvl4pPr marL="1371566" indent="0">
               <a:buNone/>
               <a:defRPr sz="1600" b="1"/>
             </a:lvl4pPr>
-            <a:lvl5pPr marL="1828800" indent="0">
+            <a:lvl5pPr marL="1828754" indent="0">
               <a:buNone/>
               <a:defRPr sz="1600" b="1"/>
             </a:lvl5pPr>
-            <a:lvl6pPr marL="2286000" indent="0">
+            <a:lvl6pPr marL="2285943" indent="0">
               <a:buNone/>
               <a:defRPr sz="1600" b="1"/>
             </a:lvl6pPr>
-            <a:lvl7pPr marL="2743200" indent="0">
+            <a:lvl7pPr marL="2743132" indent="0">
               <a:buNone/>
               <a:defRPr sz="1600" b="1"/>
             </a:lvl7pPr>
-            <a:lvl8pPr marL="3200400" indent="0">
+            <a:lvl8pPr marL="3200320" indent="0">
               <a:buNone/>
               <a:defRPr sz="1600" b="1"/>
             </a:lvl8pPr>
-            <a:lvl9pPr marL="3657600" indent="0">
+            <a:lvl9pPr marL="3657509" indent="0">
               <a:buNone/>
               <a:defRPr sz="1600" b="1"/>
             </a:lvl9pPr>
@@ -1629,8 +1679,8 @@
           <a:p>
             <a:pPr lvl="0"/>
             <a:r>
-              <a:rPr lang="zh-TW" altLang="en-US" smtClean="0"/>
-              <a:t>按一下以編輯母片文字樣式</a:t>
+              <a:rPr lang="en-US" altLang="zh-TW"/>
+              <a:t>Click to edit Master text styles</a:t>
             </a:r>
           </a:p>
         </p:txBody>
@@ -1647,8 +1697,8 @@
         </p:nvSpPr>
         <p:spPr>
           <a:xfrm>
-            <a:off x="4645025" y="2174875"/>
-            <a:ext cx="4041775" cy="3951288"/>
+            <a:off x="6193373" y="2174875"/>
+            <a:ext cx="5389033" cy="3951288"/>
           </a:xfrm>
         </p:spPr>
         <p:txBody>
@@ -1685,36 +1735,36 @@
           <a:p>
             <a:pPr lvl="0"/>
             <a:r>
-              <a:rPr lang="zh-TW" altLang="en-US" smtClean="0"/>
-              <a:t>按一下以編輯母片文字樣式</a:t>
+              <a:rPr lang="en-US" altLang="zh-TW"/>
+              <a:t>Click to edit Master text styles</a:t>
             </a:r>
           </a:p>
           <a:p>
             <a:pPr lvl="1"/>
             <a:r>
-              <a:rPr lang="zh-TW" altLang="en-US" smtClean="0"/>
-              <a:t>第二層</a:t>
+              <a:rPr lang="en-US" altLang="zh-TW"/>
+              <a:t>Second level</a:t>
             </a:r>
           </a:p>
           <a:p>
             <a:pPr lvl="2"/>
             <a:r>
-              <a:rPr lang="zh-TW" altLang="en-US" smtClean="0"/>
-              <a:t>第三層</a:t>
+              <a:rPr lang="en-US" altLang="zh-TW"/>
+              <a:t>Third level</a:t>
             </a:r>
           </a:p>
           <a:p>
             <a:pPr lvl="3"/>
             <a:r>
-              <a:rPr lang="zh-TW" altLang="en-US" smtClean="0"/>
-              <a:t>第四層</a:t>
+              <a:rPr lang="en-US" altLang="zh-TW"/>
+              <a:t>Fourth level</a:t>
             </a:r>
           </a:p>
           <a:p>
             <a:pPr lvl="4"/>
             <a:r>
-              <a:rPr lang="zh-TW" altLang="en-US" smtClean="0"/>
-              <a:t>第五層</a:t>
+              <a:rPr lang="en-US" altLang="zh-TW"/>
+              <a:t>Fifth level</a:t>
             </a:r>
             <a:endParaRPr lang="zh-TW" altLang="en-US"/>
           </a:p>
@@ -1737,7 +1787,7 @@
           <a:p>
             <a:fld id="{0FFEF273-F592-4256-8BF3-017BE16D08B7}" type="datetimeFigureOut">
               <a:rPr lang="zh-TW" altLang="en-US" smtClean="0"/>
-              <a:t>2020/6/12</a:t>
+              <a:t>2025/10/17</a:t>
             </a:fld>
             <a:endParaRPr lang="zh-TW" altLang="en-US"/>
           </a:p>
@@ -1786,6 +1836,11 @@
         </p:txBody>
       </p:sp>
     </p:spTree>
+    <p:extLst>
+      <p:ext uri="{BB962C8B-B14F-4D97-AF65-F5344CB8AC3E}">
+        <p14:creationId xmlns:p14="http://schemas.microsoft.com/office/powerpoint/2010/main" val="2984389292"/>
+      </p:ext>
+    </p:extLst>
   </p:cSld>
   <p:clrMapOvr>
     <a:masterClrMapping/>
@@ -1826,8 +1881,8 @@
           <a:lstStyle/>
           <a:p>
             <a:r>
-              <a:rPr lang="zh-TW" altLang="en-US" smtClean="0"/>
-              <a:t>按一下以編輯母片標題樣式</a:t>
+              <a:rPr lang="en-US" altLang="zh-TW"/>
+              <a:t>Click to edit Master title style</a:t>
             </a:r>
             <a:endParaRPr lang="zh-TW" altLang="en-US"/>
           </a:p>
@@ -1850,7 +1905,7 @@
           <a:p>
             <a:fld id="{0FFEF273-F592-4256-8BF3-017BE16D08B7}" type="datetimeFigureOut">
               <a:rPr lang="zh-TW" altLang="en-US" smtClean="0"/>
-              <a:t>2020/6/12</a:t>
+              <a:t>2025/10/17</a:t>
             </a:fld>
             <a:endParaRPr lang="zh-TW" altLang="en-US"/>
           </a:p>
@@ -1899,6 +1954,11 @@
         </p:txBody>
       </p:sp>
     </p:spTree>
+    <p:extLst>
+      <p:ext uri="{BB962C8B-B14F-4D97-AF65-F5344CB8AC3E}">
+        <p14:creationId xmlns:p14="http://schemas.microsoft.com/office/powerpoint/2010/main" val="2393194579"/>
+      </p:ext>
+    </p:extLst>
   </p:cSld>
   <p:clrMapOvr>
     <a:masterClrMapping/>
@@ -1940,7 +2000,7 @@
           <a:p>
             <a:fld id="{0FFEF273-F592-4256-8BF3-017BE16D08B7}" type="datetimeFigureOut">
               <a:rPr lang="zh-TW" altLang="en-US" smtClean="0"/>
-              <a:t>2020/6/12</a:t>
+              <a:t>2025/10/17</a:t>
             </a:fld>
             <a:endParaRPr lang="zh-TW" altLang="en-US"/>
           </a:p>
@@ -1989,6 +2049,11 @@
         </p:txBody>
       </p:sp>
     </p:spTree>
+    <p:extLst>
+      <p:ext uri="{BB962C8B-B14F-4D97-AF65-F5344CB8AC3E}">
+        <p14:creationId xmlns:p14="http://schemas.microsoft.com/office/powerpoint/2010/main" val="4125258023"/>
+      </p:ext>
+    </p:extLst>
   </p:cSld>
   <p:clrMapOvr>
     <a:masterClrMapping/>
@@ -2025,8 +2090,8 @@
         </p:nvSpPr>
         <p:spPr>
           <a:xfrm>
-            <a:off x="457200" y="273050"/>
-            <a:ext cx="3008313" cy="1162050"/>
+            <a:off x="609603" y="273051"/>
+            <a:ext cx="4011084" cy="1162051"/>
           </a:xfrm>
         </p:spPr>
         <p:txBody>
@@ -2038,8 +2103,8 @@
           </a:lstStyle>
           <a:p>
             <a:r>
-              <a:rPr lang="zh-TW" altLang="en-US" smtClean="0"/>
-              <a:t>按一下以編輯母片標題樣式</a:t>
+              <a:rPr lang="en-US" altLang="zh-TW"/>
+              <a:t>Click to edit Master title style</a:t>
             </a:r>
             <a:endParaRPr lang="zh-TW" altLang="en-US"/>
           </a:p>
@@ -2057,8 +2122,8 @@
         </p:nvSpPr>
         <p:spPr>
           <a:xfrm>
-            <a:off x="3575050" y="273050"/>
-            <a:ext cx="5111750" cy="5853113"/>
+            <a:off x="4766733" y="273055"/>
+            <a:ext cx="6815667" cy="5853113"/>
           </a:xfrm>
         </p:spPr>
         <p:txBody>
@@ -2095,36 +2160,36 @@
           <a:p>
             <a:pPr lvl="0"/>
             <a:r>
-              <a:rPr lang="zh-TW" altLang="en-US" smtClean="0"/>
-              <a:t>按一下以編輯母片文字樣式</a:t>
+              <a:rPr lang="en-US" altLang="zh-TW"/>
+              <a:t>Click to edit Master text styles</a:t>
             </a:r>
           </a:p>
           <a:p>
             <a:pPr lvl="1"/>
             <a:r>
-              <a:rPr lang="zh-TW" altLang="en-US" smtClean="0"/>
-              <a:t>第二層</a:t>
+              <a:rPr lang="en-US" altLang="zh-TW"/>
+              <a:t>Second level</a:t>
             </a:r>
           </a:p>
           <a:p>
             <a:pPr lvl="2"/>
             <a:r>
-              <a:rPr lang="zh-TW" altLang="en-US" smtClean="0"/>
-              <a:t>第三層</a:t>
+              <a:rPr lang="en-US" altLang="zh-TW"/>
+              <a:t>Third level</a:t>
             </a:r>
           </a:p>
           <a:p>
             <a:pPr lvl="3"/>
             <a:r>
-              <a:rPr lang="zh-TW" altLang="en-US" smtClean="0"/>
-              <a:t>第四層</a:t>
+              <a:rPr lang="en-US" altLang="zh-TW"/>
+              <a:t>Fourth level</a:t>
             </a:r>
           </a:p>
           <a:p>
             <a:pPr lvl="4"/>
             <a:r>
-              <a:rPr lang="zh-TW" altLang="en-US" smtClean="0"/>
-              <a:t>第五層</a:t>
+              <a:rPr lang="en-US" altLang="zh-TW"/>
+              <a:t>Fifth level</a:t>
             </a:r>
             <a:endParaRPr lang="zh-TW" altLang="en-US"/>
           </a:p>
@@ -2142,8 +2207,8 @@
         </p:nvSpPr>
         <p:spPr>
           <a:xfrm>
-            <a:off x="457200" y="1435100"/>
-            <a:ext cx="3008313" cy="4691063"/>
+            <a:off x="609603" y="1435103"/>
+            <a:ext cx="4011084" cy="4691063"/>
           </a:xfrm>
         </p:spPr>
         <p:txBody>
@@ -2153,35 +2218,35 @@
               <a:buNone/>
               <a:defRPr sz="1400"/>
             </a:lvl1pPr>
-            <a:lvl2pPr marL="457200" indent="0">
+            <a:lvl2pPr marL="457189" indent="0">
               <a:buNone/>
               <a:defRPr sz="1200"/>
             </a:lvl2pPr>
-            <a:lvl3pPr marL="914400" indent="0">
+            <a:lvl3pPr marL="914378" indent="0">
               <a:buNone/>
               <a:defRPr sz="1000"/>
             </a:lvl3pPr>
-            <a:lvl4pPr marL="1371600" indent="0">
+            <a:lvl4pPr marL="1371566" indent="0">
               <a:buNone/>
               <a:defRPr sz="900"/>
             </a:lvl4pPr>
-            <a:lvl5pPr marL="1828800" indent="0">
+            <a:lvl5pPr marL="1828754" indent="0">
               <a:buNone/>
               <a:defRPr sz="900"/>
             </a:lvl5pPr>
-            <a:lvl6pPr marL="2286000" indent="0">
+            <a:lvl6pPr marL="2285943" indent="0">
               <a:buNone/>
               <a:defRPr sz="900"/>
             </a:lvl6pPr>
-            <a:lvl7pPr marL="2743200" indent="0">
+            <a:lvl7pPr marL="2743132" indent="0">
               <a:buNone/>
               <a:defRPr sz="900"/>
             </a:lvl7pPr>
-            <a:lvl8pPr marL="3200400" indent="0">
+            <a:lvl8pPr marL="3200320" indent="0">
               <a:buNone/>
               <a:defRPr sz="900"/>
             </a:lvl8pPr>
-            <a:lvl9pPr marL="3657600" indent="0">
+            <a:lvl9pPr marL="3657509" indent="0">
               <a:buNone/>
               <a:defRPr sz="900"/>
             </a:lvl9pPr>
@@ -2189,8 +2254,8 @@
           <a:p>
             <a:pPr lvl="0"/>
             <a:r>
-              <a:rPr lang="zh-TW" altLang="en-US" smtClean="0"/>
-              <a:t>按一下以編輯母片文字樣式</a:t>
+              <a:rPr lang="en-US" altLang="zh-TW"/>
+              <a:t>Click to edit Master text styles</a:t>
             </a:r>
           </a:p>
         </p:txBody>
@@ -2212,7 +2277,7 @@
           <a:p>
             <a:fld id="{0FFEF273-F592-4256-8BF3-017BE16D08B7}" type="datetimeFigureOut">
               <a:rPr lang="zh-TW" altLang="en-US" smtClean="0"/>
-              <a:t>2020/6/12</a:t>
+              <a:t>2025/10/17</a:t>
             </a:fld>
             <a:endParaRPr lang="zh-TW" altLang="en-US"/>
           </a:p>
@@ -2261,6 +2326,11 @@
         </p:txBody>
       </p:sp>
     </p:spTree>
+    <p:extLst>
+      <p:ext uri="{BB962C8B-B14F-4D97-AF65-F5344CB8AC3E}">
+        <p14:creationId xmlns:p14="http://schemas.microsoft.com/office/powerpoint/2010/main" val="1761380518"/>
+      </p:ext>
+    </p:extLst>
   </p:cSld>
   <p:clrMapOvr>
     <a:masterClrMapping/>
@@ -2297,8 +2367,8 @@
         </p:nvSpPr>
         <p:spPr>
           <a:xfrm>
-            <a:off x="1792288" y="4800600"/>
-            <a:ext cx="5486400" cy="566738"/>
+            <a:off x="2389717" y="4800603"/>
+            <a:ext cx="7315200" cy="566739"/>
           </a:xfrm>
         </p:spPr>
         <p:txBody>
@@ -2310,8 +2380,8 @@
           </a:lstStyle>
           <a:p>
             <a:r>
-              <a:rPr lang="zh-TW" altLang="en-US" smtClean="0"/>
-              <a:t>按一下以編輯母片標題樣式</a:t>
+              <a:rPr lang="en-US" altLang="zh-TW"/>
+              <a:t>Click to edit Master title style</a:t>
             </a:r>
             <a:endParaRPr lang="zh-TW" altLang="en-US"/>
           </a:p>
@@ -2329,8 +2399,8 @@
         </p:nvSpPr>
         <p:spPr>
           <a:xfrm>
-            <a:off x="1792288" y="612775"/>
-            <a:ext cx="5486400" cy="4114800"/>
+            <a:off x="2389717" y="612775"/>
+            <a:ext cx="7315200" cy="4114800"/>
           </a:xfrm>
         </p:spPr>
         <p:txBody>
@@ -2340,40 +2410,44 @@
               <a:buNone/>
               <a:defRPr sz="3200"/>
             </a:lvl1pPr>
-            <a:lvl2pPr marL="457200" indent="0">
+            <a:lvl2pPr marL="457189" indent="0">
               <a:buNone/>
               <a:defRPr sz="2800"/>
             </a:lvl2pPr>
-            <a:lvl3pPr marL="914400" indent="0">
+            <a:lvl3pPr marL="914378" indent="0">
               <a:buNone/>
               <a:defRPr sz="2400"/>
             </a:lvl3pPr>
-            <a:lvl4pPr marL="1371600" indent="0">
+            <a:lvl4pPr marL="1371566" indent="0">
               <a:buNone/>
               <a:defRPr sz="2000"/>
             </a:lvl4pPr>
-            <a:lvl5pPr marL="1828800" indent="0">
+            <a:lvl5pPr marL="1828754" indent="0">
               <a:buNone/>
               <a:defRPr sz="2000"/>
             </a:lvl5pPr>
-            <a:lvl6pPr marL="2286000" indent="0">
+            <a:lvl6pPr marL="2285943" indent="0">
               <a:buNone/>
               <a:defRPr sz="2000"/>
             </a:lvl6pPr>
-            <a:lvl7pPr marL="2743200" indent="0">
+            <a:lvl7pPr marL="2743132" indent="0">
               <a:buNone/>
               <a:defRPr sz="2000"/>
             </a:lvl7pPr>
-            <a:lvl8pPr marL="3200400" indent="0">
+            <a:lvl8pPr marL="3200320" indent="0">
               <a:buNone/>
               <a:defRPr sz="2000"/>
             </a:lvl8pPr>
-            <a:lvl9pPr marL="3657600" indent="0">
+            <a:lvl9pPr marL="3657509" indent="0">
               <a:buNone/>
               <a:defRPr sz="2000"/>
             </a:lvl9pPr>
           </a:lstStyle>
           <a:p>
+            <a:r>
+              <a:rPr lang="en-US" altLang="zh-TW"/>
+              <a:t>Click icon to add picture</a:t>
+            </a:r>
             <a:endParaRPr lang="zh-TW" altLang="en-US"/>
           </a:p>
         </p:txBody>
@@ -2390,8 +2464,8 @@
         </p:nvSpPr>
         <p:spPr>
           <a:xfrm>
-            <a:off x="1792288" y="5367338"/>
-            <a:ext cx="5486400" cy="804862"/>
+            <a:off x="2389717" y="5367341"/>
+            <a:ext cx="7315200" cy="804863"/>
           </a:xfrm>
         </p:spPr>
         <p:txBody>
@@ -2401,35 +2475,35 @@
               <a:buNone/>
               <a:defRPr sz="1400"/>
             </a:lvl1pPr>
-            <a:lvl2pPr marL="457200" indent="0">
+            <a:lvl2pPr marL="457189" indent="0">
               <a:buNone/>
               <a:defRPr sz="1200"/>
             </a:lvl2pPr>
-            <a:lvl3pPr marL="914400" indent="0">
+            <a:lvl3pPr marL="914378" indent="0">
               <a:buNone/>
               <a:defRPr sz="1000"/>
             </a:lvl3pPr>
-            <a:lvl4pPr marL="1371600" indent="0">
+            <a:lvl4pPr marL="1371566" indent="0">
               <a:buNone/>
               <a:defRPr sz="900"/>
             </a:lvl4pPr>
-            <a:lvl5pPr marL="1828800" indent="0">
+            <a:lvl5pPr marL="1828754" indent="0">
               <a:buNone/>
               <a:defRPr sz="900"/>
             </a:lvl5pPr>
-            <a:lvl6pPr marL="2286000" indent="0">
+            <a:lvl6pPr marL="2285943" indent="0">
               <a:buNone/>
               <a:defRPr sz="900"/>
             </a:lvl6pPr>
-            <a:lvl7pPr marL="2743200" indent="0">
+            <a:lvl7pPr marL="2743132" indent="0">
               <a:buNone/>
               <a:defRPr sz="900"/>
             </a:lvl7pPr>
-            <a:lvl8pPr marL="3200400" indent="0">
+            <a:lvl8pPr marL="3200320" indent="0">
               <a:buNone/>
               <a:defRPr sz="900"/>
             </a:lvl8pPr>
-            <a:lvl9pPr marL="3657600" indent="0">
+            <a:lvl9pPr marL="3657509" indent="0">
               <a:buNone/>
               <a:defRPr sz="900"/>
             </a:lvl9pPr>
@@ -2437,8 +2511,8 @@
           <a:p>
             <a:pPr lvl="0"/>
             <a:r>
-              <a:rPr lang="zh-TW" altLang="en-US" smtClean="0"/>
-              <a:t>按一下以編輯母片文字樣式</a:t>
+              <a:rPr lang="en-US" altLang="zh-TW"/>
+              <a:t>Click to edit Master text styles</a:t>
             </a:r>
           </a:p>
         </p:txBody>
@@ -2460,7 +2534,7 @@
           <a:p>
             <a:fld id="{0FFEF273-F592-4256-8BF3-017BE16D08B7}" type="datetimeFigureOut">
               <a:rPr lang="zh-TW" altLang="en-US" smtClean="0"/>
-              <a:t>2020/6/12</a:t>
+              <a:t>2025/10/17</a:t>
             </a:fld>
             <a:endParaRPr lang="zh-TW" altLang="en-US"/>
           </a:p>
@@ -2509,6 +2583,11 @@
         </p:txBody>
       </p:sp>
     </p:spTree>
+    <p:extLst>
+      <p:ext uri="{BB962C8B-B14F-4D97-AF65-F5344CB8AC3E}">
+        <p14:creationId xmlns:p14="http://schemas.microsoft.com/office/powerpoint/2010/main" val="3470508766"/>
+      </p:ext>
+    </p:extLst>
   </p:cSld>
   <p:clrMapOvr>
     <a:masterClrMapping/>
@@ -2520,9 +2599,14 @@
 <p:sldMaster xmlns:a="http://schemas.openxmlformats.org/drawingml/2006/main" xmlns:r="http://schemas.openxmlformats.org/officeDocument/2006/relationships" xmlns:p="http://schemas.openxmlformats.org/presentationml/2006/main">
   <p:cSld>
     <p:bg>
-      <p:bgRef idx="1001">
-        <a:schemeClr val="bg1"/>
-      </p:bgRef>
+      <p:bgPr>
+        <a:blipFill dpi="0" rotWithShape="1">
+          <a:blip r:embed="rId13"/>
+          <a:srcRect/>
+          <a:tile tx="0" ty="0" sx="100000" sy="100000" flip="none" algn="tl"/>
+        </a:blipFill>
+        <a:effectLst/>
+      </p:bgPr>
     </p:bg>
     <p:spTree>
       <p:nvGrpSpPr>
@@ -2550,8 +2634,8 @@
         </p:nvSpPr>
         <p:spPr>
           <a:xfrm>
-            <a:off x="457200" y="274638"/>
-            <a:ext cx="8229600" cy="1143000"/>
+            <a:off x="609600" y="274637"/>
+            <a:ext cx="10972800" cy="1143000"/>
           </a:xfrm>
           <a:prstGeom prst="rect">
             <a:avLst/>
@@ -2564,10 +2648,9 @@
           <a:lstStyle/>
           <a:p>
             <a:r>
-              <a:rPr lang="zh-TW" altLang="en-US" smtClean="0"/>
+              <a:rPr lang="zh-TW" altLang="en-US"/>
               <a:t>按一下以編輯母片標題樣式</a:t>
             </a:r>
-            <a:endParaRPr lang="zh-TW" altLang="en-US"/>
           </a:p>
         </p:txBody>
       </p:sp>
@@ -2583,8 +2666,8 @@
         </p:nvSpPr>
         <p:spPr>
           <a:xfrm>
-            <a:off x="457200" y="1600200"/>
-            <a:ext cx="8229600" cy="4525963"/>
+            <a:off x="609600" y="1600203"/>
+            <a:ext cx="10972800" cy="4525963"/>
           </a:xfrm>
           <a:prstGeom prst="rect">
             <a:avLst/>
@@ -2598,38 +2681,37 @@
           <a:p>
             <a:pPr lvl="0"/>
             <a:r>
-              <a:rPr lang="zh-TW" altLang="en-US" smtClean="0"/>
+              <a:rPr lang="zh-TW" altLang="en-US"/>
               <a:t>按一下以編輯母片文字樣式</a:t>
             </a:r>
           </a:p>
           <a:p>
             <a:pPr lvl="1"/>
             <a:r>
-              <a:rPr lang="zh-TW" altLang="en-US" smtClean="0"/>
+              <a:rPr lang="zh-TW" altLang="en-US"/>
               <a:t>第二層</a:t>
             </a:r>
           </a:p>
           <a:p>
             <a:pPr lvl="2"/>
             <a:r>
-              <a:rPr lang="zh-TW" altLang="en-US" smtClean="0"/>
+              <a:rPr lang="zh-TW" altLang="en-US"/>
               <a:t>第三層</a:t>
             </a:r>
           </a:p>
           <a:p>
             <a:pPr lvl="3"/>
             <a:r>
-              <a:rPr lang="zh-TW" altLang="en-US" smtClean="0"/>
+              <a:rPr lang="zh-TW" altLang="en-US"/>
               <a:t>第四層</a:t>
             </a:r>
           </a:p>
           <a:p>
             <a:pPr lvl="4"/>
             <a:r>
-              <a:rPr lang="zh-TW" altLang="en-US" smtClean="0"/>
+              <a:rPr lang="zh-TW" altLang="en-US"/>
               <a:t>第五層</a:t>
             </a:r>
-            <a:endParaRPr lang="zh-TW" altLang="en-US"/>
           </a:p>
         </p:txBody>
       </p:sp>
@@ -2645,8 +2727,8 @@
         </p:nvSpPr>
         <p:spPr>
           <a:xfrm>
-            <a:off x="457200" y="6356350"/>
-            <a:ext cx="2133600" cy="365125"/>
+            <a:off x="609600" y="6356354"/>
+            <a:ext cx="2844800" cy="365125"/>
           </a:xfrm>
           <a:prstGeom prst="rect">
             <a:avLst/>
@@ -2668,7 +2750,7 @@
           <a:p>
             <a:fld id="{0FFEF273-F592-4256-8BF3-017BE16D08B7}" type="datetimeFigureOut">
               <a:rPr lang="zh-TW" altLang="en-US" smtClean="0"/>
-              <a:t>2020/6/12</a:t>
+              <a:t>2025/10/17</a:t>
             </a:fld>
             <a:endParaRPr lang="zh-TW" altLang="en-US"/>
           </a:p>
@@ -2686,8 +2768,8 @@
         </p:nvSpPr>
         <p:spPr>
           <a:xfrm>
-            <a:off x="3124200" y="6356350"/>
-            <a:ext cx="2895600" cy="365125"/>
+            <a:off x="4165600" y="6356354"/>
+            <a:ext cx="3860800" cy="365125"/>
           </a:xfrm>
           <a:prstGeom prst="rect">
             <a:avLst/>
@@ -2723,8 +2805,8 @@
         </p:nvSpPr>
         <p:spPr>
           <a:xfrm>
-            <a:off x="6553200" y="6356350"/>
-            <a:ext cx="2133600" cy="365125"/>
+            <a:off x="8737600" y="6356354"/>
+            <a:ext cx="2844800" cy="365125"/>
           </a:xfrm>
           <a:prstGeom prst="rect">
             <a:avLst/>
@@ -2753,24 +2835,29 @@
         </p:txBody>
       </p:sp>
     </p:spTree>
+    <p:extLst>
+      <p:ext uri="{BB962C8B-B14F-4D97-AF65-F5344CB8AC3E}">
+        <p14:creationId xmlns:p14="http://schemas.microsoft.com/office/powerpoint/2010/main" val="2630865630"/>
+      </p:ext>
+    </p:extLst>
   </p:cSld>
   <p:clrMap bg1="lt1" tx1="dk1" bg2="lt2" tx2="dk2" accent1="accent1" accent2="accent2" accent3="accent3" accent4="accent4" accent5="accent5" accent6="accent6" hlink="hlink" folHlink="folHlink"/>
   <p:sldLayoutIdLst>
-    <p:sldLayoutId id="2147483649" r:id="rId1"/>
-    <p:sldLayoutId id="2147483650" r:id="rId2"/>
-    <p:sldLayoutId id="2147483651" r:id="rId3"/>
-    <p:sldLayoutId id="2147483652" r:id="rId4"/>
-    <p:sldLayoutId id="2147483653" r:id="rId5"/>
-    <p:sldLayoutId id="2147483654" r:id="rId6"/>
-    <p:sldLayoutId id="2147483655" r:id="rId7"/>
-    <p:sldLayoutId id="2147483656" r:id="rId8"/>
-    <p:sldLayoutId id="2147483657" r:id="rId9"/>
-    <p:sldLayoutId id="2147483658" r:id="rId10"/>
-    <p:sldLayoutId id="2147483659" r:id="rId11"/>
+    <p:sldLayoutId id="2147483661" r:id="rId1"/>
+    <p:sldLayoutId id="2147483662" r:id="rId2"/>
+    <p:sldLayoutId id="2147483663" r:id="rId3"/>
+    <p:sldLayoutId id="2147483664" r:id="rId4"/>
+    <p:sldLayoutId id="2147483665" r:id="rId5"/>
+    <p:sldLayoutId id="2147483666" r:id="rId6"/>
+    <p:sldLayoutId id="2147483667" r:id="rId7"/>
+    <p:sldLayoutId id="2147483668" r:id="rId8"/>
+    <p:sldLayoutId id="2147483669" r:id="rId9"/>
+    <p:sldLayoutId id="2147483670" r:id="rId10"/>
+    <p:sldLayoutId id="2147483671" r:id="rId11"/>
   </p:sldLayoutIdLst>
   <p:txStyles>
     <p:titleStyle>
-      <a:lvl1pPr algn="ctr" defTabSz="914400" rtl="0" eaLnBrk="1" latinLnBrk="0" hangingPunct="1">
+      <a:lvl1pPr algn="ctr" defTabSz="914378" rtl="0" eaLnBrk="1" latinLnBrk="0" hangingPunct="1">
         <a:spcBef>
           <a:spcPct val="0"/>
         </a:spcBef>
@@ -2786,11 +2873,11 @@
       </a:lvl1pPr>
     </p:titleStyle>
     <p:bodyStyle>
-      <a:lvl1pPr marL="342900" indent="-342900" algn="l" defTabSz="914400" rtl="0" eaLnBrk="1" latinLnBrk="0" hangingPunct="1">
+      <a:lvl1pPr marL="342892" indent="-342892" algn="l" defTabSz="914378" rtl="0" eaLnBrk="1" latinLnBrk="0" hangingPunct="1">
         <a:spcBef>
           <a:spcPct val="20000"/>
         </a:spcBef>
-        <a:buFont typeface="Arial" pitchFamily="34" charset="0"/>
+        <a:buFont typeface="Arial" panose="02080604020202020204" pitchFamily="34" charset="0"/>
         <a:buChar char="•"/>
         <a:defRPr sz="3200" kern="1200">
           <a:solidFill>
@@ -2801,11 +2888,11 @@
           <a:cs typeface="+mn-cs"/>
         </a:defRPr>
       </a:lvl1pPr>
-      <a:lvl2pPr marL="742950" indent="-285750" algn="l" defTabSz="914400" rtl="0" eaLnBrk="1" latinLnBrk="0" hangingPunct="1">
+      <a:lvl2pPr marL="742931" indent="-285743" algn="l" defTabSz="914378" rtl="0" eaLnBrk="1" latinLnBrk="0" hangingPunct="1">
         <a:spcBef>
           <a:spcPct val="20000"/>
         </a:spcBef>
-        <a:buFont typeface="Arial" pitchFamily="34" charset="0"/>
+        <a:buFont typeface="Arial" panose="02080604020202020204" pitchFamily="34" charset="0"/>
         <a:buChar char="–"/>
         <a:defRPr sz="2800" kern="1200">
           <a:solidFill>
@@ -2816,11 +2903,11 @@
           <a:cs typeface="+mn-cs"/>
         </a:defRPr>
       </a:lvl2pPr>
-      <a:lvl3pPr marL="1143000" indent="-228600" algn="l" defTabSz="914400" rtl="0" eaLnBrk="1" latinLnBrk="0" hangingPunct="1">
+      <a:lvl3pPr marL="1142972" indent="-228594" algn="l" defTabSz="914378" rtl="0" eaLnBrk="1" latinLnBrk="0" hangingPunct="1">
         <a:spcBef>
           <a:spcPct val="20000"/>
         </a:spcBef>
-        <a:buFont typeface="Arial" pitchFamily="34" charset="0"/>
+        <a:buFont typeface="Arial" panose="02080604020202020204" pitchFamily="34" charset="0"/>
         <a:buChar char="•"/>
         <a:defRPr sz="2400" kern="1200">
           <a:solidFill>
@@ -2831,11 +2918,11 @@
           <a:cs typeface="+mn-cs"/>
         </a:defRPr>
       </a:lvl3pPr>
-      <a:lvl4pPr marL="1600200" indent="-228600" algn="l" defTabSz="914400" rtl="0" eaLnBrk="1" latinLnBrk="0" hangingPunct="1">
+      <a:lvl4pPr marL="1600160" indent="-228594" algn="l" defTabSz="914378" rtl="0" eaLnBrk="1" latinLnBrk="0" hangingPunct="1">
         <a:spcBef>
           <a:spcPct val="20000"/>
         </a:spcBef>
-        <a:buFont typeface="Arial" pitchFamily="34" charset="0"/>
+        <a:buFont typeface="Arial" panose="02080604020202020204" pitchFamily="34" charset="0"/>
         <a:buChar char="–"/>
         <a:defRPr sz="2000" kern="1200">
           <a:solidFill>
@@ -2846,11 +2933,11 @@
           <a:cs typeface="+mn-cs"/>
         </a:defRPr>
       </a:lvl4pPr>
-      <a:lvl5pPr marL="2057400" indent="-228600" algn="l" defTabSz="914400" rtl="0" eaLnBrk="1" latinLnBrk="0" hangingPunct="1">
+      <a:lvl5pPr marL="2057348" indent="-228594" algn="l" defTabSz="914378" rtl="0" eaLnBrk="1" latinLnBrk="0" hangingPunct="1">
         <a:spcBef>
           <a:spcPct val="20000"/>
         </a:spcBef>
-        <a:buFont typeface="Arial" pitchFamily="34" charset="0"/>
+        <a:buFont typeface="Arial" panose="02080604020202020204" pitchFamily="34" charset="0"/>
         <a:buChar char="»"/>
         <a:defRPr sz="2000" kern="1200">
           <a:solidFill>
@@ -2861,11 +2948,11 @@
           <a:cs typeface="+mn-cs"/>
         </a:defRPr>
       </a:lvl5pPr>
-      <a:lvl6pPr marL="2514600" indent="-228600" algn="l" defTabSz="914400" rtl="0" eaLnBrk="1" latinLnBrk="0" hangingPunct="1">
+      <a:lvl6pPr marL="2514537" indent="-228594" algn="l" defTabSz="914378" rtl="0" eaLnBrk="1" latinLnBrk="0" hangingPunct="1">
         <a:spcBef>
           <a:spcPct val="20000"/>
         </a:spcBef>
-        <a:buFont typeface="Arial" pitchFamily="34" charset="0"/>
+        <a:buFont typeface="Arial" panose="02080604020202020204" pitchFamily="34" charset="0"/>
         <a:buChar char="•"/>
         <a:defRPr sz="2000" kern="1200">
           <a:solidFill>
@@ -2876,11 +2963,11 @@
           <a:cs typeface="+mn-cs"/>
         </a:defRPr>
       </a:lvl6pPr>
-      <a:lvl7pPr marL="2971800" indent="-228600" algn="l" defTabSz="914400" rtl="0" eaLnBrk="1" latinLnBrk="0" hangingPunct="1">
+      <a:lvl7pPr marL="2971726" indent="-228594" algn="l" defTabSz="914378" rtl="0" eaLnBrk="1" latinLnBrk="0" hangingPunct="1">
         <a:spcBef>
           <a:spcPct val="20000"/>
         </a:spcBef>
-        <a:buFont typeface="Arial" pitchFamily="34" charset="0"/>
+        <a:buFont typeface="Arial" panose="02080604020202020204" pitchFamily="34" charset="0"/>
         <a:buChar char="•"/>
         <a:defRPr sz="2000" kern="1200">
           <a:solidFill>
@@ -2891,11 +2978,11 @@
           <a:cs typeface="+mn-cs"/>
         </a:defRPr>
       </a:lvl7pPr>
-      <a:lvl8pPr marL="3429000" indent="-228600" algn="l" defTabSz="914400" rtl="0" eaLnBrk="1" latinLnBrk="0" hangingPunct="1">
+      <a:lvl8pPr marL="3428915" indent="-228594" algn="l" defTabSz="914378" rtl="0" eaLnBrk="1" latinLnBrk="0" hangingPunct="1">
         <a:spcBef>
           <a:spcPct val="20000"/>
         </a:spcBef>
-        <a:buFont typeface="Arial" pitchFamily="34" charset="0"/>
+        <a:buFont typeface="Arial" panose="02080604020202020204" pitchFamily="34" charset="0"/>
         <a:buChar char="•"/>
         <a:defRPr sz="2000" kern="1200">
           <a:solidFill>
@@ -2906,11 +2993,11 @@
           <a:cs typeface="+mn-cs"/>
         </a:defRPr>
       </a:lvl8pPr>
-      <a:lvl9pPr marL="3886200" indent="-228600" algn="l" defTabSz="914400" rtl="0" eaLnBrk="1" latinLnBrk="0" hangingPunct="1">
+      <a:lvl9pPr marL="3886103" indent="-228594" algn="l" defTabSz="914378" rtl="0" eaLnBrk="1" latinLnBrk="0" hangingPunct="1">
         <a:spcBef>
           <a:spcPct val="20000"/>
         </a:spcBef>
-        <a:buFont typeface="Arial" pitchFamily="34" charset="0"/>
+        <a:buFont typeface="Arial" panose="02080604020202020204" pitchFamily="34" charset="0"/>
         <a:buChar char="•"/>
         <a:defRPr sz="2000" kern="1200">
           <a:solidFill>
@@ -2926,7 +3013,7 @@
       <a:defPPr>
         <a:defRPr lang="zh-TW"/>
       </a:defPPr>
-      <a:lvl1pPr marL="0" algn="l" defTabSz="914400" rtl="0" eaLnBrk="1" latinLnBrk="0" hangingPunct="1">
+      <a:lvl1pPr marL="0" algn="l" defTabSz="914378" rtl="0" eaLnBrk="1" latinLnBrk="0" hangingPunct="1">
         <a:defRPr sz="1800" kern="1200">
           <a:solidFill>
             <a:schemeClr val="tx1"/>
@@ -2936,7 +3023,7 @@
           <a:cs typeface="+mn-cs"/>
         </a:defRPr>
       </a:lvl1pPr>
-      <a:lvl2pPr marL="457200" algn="l" defTabSz="914400" rtl="0" eaLnBrk="1" latinLnBrk="0" hangingPunct="1">
+      <a:lvl2pPr marL="457189" algn="l" defTabSz="914378" rtl="0" eaLnBrk="1" latinLnBrk="0" hangingPunct="1">
         <a:defRPr sz="1800" kern="1200">
           <a:solidFill>
             <a:schemeClr val="tx1"/>
@@ -2946,7 +3033,7 @@
           <a:cs typeface="+mn-cs"/>
         </a:defRPr>
       </a:lvl2pPr>
-      <a:lvl3pPr marL="914400" algn="l" defTabSz="914400" rtl="0" eaLnBrk="1" latinLnBrk="0" hangingPunct="1">
+      <a:lvl3pPr marL="914378" algn="l" defTabSz="914378" rtl="0" eaLnBrk="1" latinLnBrk="0" hangingPunct="1">
         <a:defRPr sz="1800" kern="1200">
           <a:solidFill>
             <a:schemeClr val="tx1"/>
@@ -2956,7 +3043,7 @@
           <a:cs typeface="+mn-cs"/>
         </a:defRPr>
       </a:lvl3pPr>
-      <a:lvl4pPr marL="1371600" algn="l" defTabSz="914400" rtl="0" eaLnBrk="1" latinLnBrk="0" hangingPunct="1">
+      <a:lvl4pPr marL="1371566" algn="l" defTabSz="914378" rtl="0" eaLnBrk="1" latinLnBrk="0" hangingPunct="1">
         <a:defRPr sz="1800" kern="1200">
           <a:solidFill>
             <a:schemeClr val="tx1"/>
@@ -2966,7 +3053,7 @@
           <a:cs typeface="+mn-cs"/>
         </a:defRPr>
       </a:lvl4pPr>
-      <a:lvl5pPr marL="1828800" algn="l" defTabSz="914400" rtl="0" eaLnBrk="1" latinLnBrk="0" hangingPunct="1">
+      <a:lvl5pPr marL="1828754" algn="l" defTabSz="914378" rtl="0" eaLnBrk="1" latinLnBrk="0" hangingPunct="1">
         <a:defRPr sz="1800" kern="1200">
           <a:solidFill>
             <a:schemeClr val="tx1"/>
@@ -2976,7 +3063,7 @@
           <a:cs typeface="+mn-cs"/>
         </a:defRPr>
       </a:lvl5pPr>
-      <a:lvl6pPr marL="2286000" algn="l" defTabSz="914400" rtl="0" eaLnBrk="1" latinLnBrk="0" hangingPunct="1">
+      <a:lvl6pPr marL="2285943" algn="l" defTabSz="914378" rtl="0" eaLnBrk="1" latinLnBrk="0" hangingPunct="1">
         <a:defRPr sz="1800" kern="1200">
           <a:solidFill>
             <a:schemeClr val="tx1"/>
@@ -2986,7 +3073,7 @@
           <a:cs typeface="+mn-cs"/>
         </a:defRPr>
       </a:lvl6pPr>
-      <a:lvl7pPr marL="2743200" algn="l" defTabSz="914400" rtl="0" eaLnBrk="1" latinLnBrk="0" hangingPunct="1">
+      <a:lvl7pPr marL="2743132" algn="l" defTabSz="914378" rtl="0" eaLnBrk="1" latinLnBrk="0" hangingPunct="1">
         <a:defRPr sz="1800" kern="1200">
           <a:solidFill>
             <a:schemeClr val="tx1"/>
@@ -2996,7 +3083,7 @@
           <a:cs typeface="+mn-cs"/>
         </a:defRPr>
       </a:lvl7pPr>
-      <a:lvl8pPr marL="3200400" algn="l" defTabSz="914400" rtl="0" eaLnBrk="1" latinLnBrk="0" hangingPunct="1">
+      <a:lvl8pPr marL="3200320" algn="l" defTabSz="914378" rtl="0" eaLnBrk="1" latinLnBrk="0" hangingPunct="1">
         <a:defRPr sz="1800" kern="1200">
           <a:solidFill>
             <a:schemeClr val="tx1"/>
@@ -3006,7 +3093,7 @@
           <a:cs typeface="+mn-cs"/>
         </a:defRPr>
       </a:lvl8pPr>
-      <a:lvl9pPr marL="3657600" algn="l" defTabSz="914400" rtl="0" eaLnBrk="1" latinLnBrk="0" hangingPunct="1">
+      <a:lvl9pPr marL="3657509" algn="l" defTabSz="914378" rtl="0" eaLnBrk="1" latinLnBrk="0" hangingPunct="1">
         <a:defRPr sz="1800" kern="1200">
           <a:solidFill>
             <a:schemeClr val="tx1"/>
@@ -3026,7 +3113,13 @@
   <p:cSld>
     <p:spTree>
       <p:nvGrpSpPr>
-        <p:cNvPr id="1" name=""/>
+        <p:cNvPr id="1" name="">
+          <a:extLst>
+            <a:ext uri="{FF2B5EF4-FFF2-40B4-BE49-F238E27FC236}">
+              <a16:creationId xmlns:a16="http://schemas.microsoft.com/office/drawing/2014/main" id="{5F20F3D7-EDDF-CE30-9060-314A88E3730B}"/>
+            </a:ext>
+          </a:extLst>
+        </p:cNvPr>
         <p:cNvGrpSpPr/>
         <p:nvPr/>
       </p:nvGrpSpPr>
@@ -3040,30 +3133,36 @@
       </p:grpSpPr>
       <p:sp>
         <p:nvSpPr>
-          <p:cNvPr id="2" name="標題 1"/>
-          <p:cNvSpPr>
-            <a:spLocks noGrp="1"/>
-          </p:cNvSpPr>
-          <p:nvPr>
-            <p:ph type="ctrTitle"/>
+          <p:cNvPr id="4" name="標題 3">
+            <a:extLst>
+              <a:ext uri="{FF2B5EF4-FFF2-40B4-BE49-F238E27FC236}">
+                <a16:creationId xmlns:a16="http://schemas.microsoft.com/office/drawing/2014/main" id="{CD6A41DD-B5E6-D530-EC0F-85726817D119}"/>
+              </a:ext>
+            </a:extLst>
+          </p:cNvPr>
+          <p:cNvSpPr>
+            <a:spLocks noGrp="1"/>
+          </p:cNvSpPr>
+          <p:nvPr>
+            <p:ph type="title"/>
           </p:nvPr>
         </p:nvSpPr>
         <p:spPr>
           <a:xfrm>
-            <a:off x="571472" y="428605"/>
-            <a:ext cx="7772400" cy="1214446"/>
+            <a:off x="0" y="2660915"/>
+            <a:ext cx="12192000" cy="1143000"/>
           </a:xfrm>
         </p:spPr>
         <p:txBody>
           <a:bodyPr>
-            <a:normAutofit/>
+            <a:noAutofit/>
           </a:bodyPr>
           <a:lstStyle/>
           <a:p>
             <a:r>
-              <a:rPr lang="zh-TW" altLang="en-US" sz="6000" b="1" dirty="0" smtClean="0">
-                <a:solidFill>
-                  <a:srgbClr val="FF0000"/>
+              <a:rPr lang="zh-TW" altLang="en-US" sz="7200" b="1" i="1" dirty="0">
+                <a:solidFill>
+                  <a:srgbClr val="000066"/>
                 </a:solidFill>
                 <a:effectLst>
                   <a:outerShdw blurRad="38100" dist="38100" dir="2700000" algn="tl">
@@ -3072,130 +3171,20 @@
                     </a:srgbClr>
                   </a:outerShdw>
                 </a:effectLst>
+                <a:latin typeface="微軟正黑體" pitchFamily="34" charset="-120"/>
+                <a:ea typeface="微軟正黑體" pitchFamily="34" charset="-120"/>
               </a:rPr>
               <a:t>神羔羊配得</a:t>
             </a:r>
-            <a:endParaRPr lang="zh-TW" altLang="en-US" sz="6000" b="1" dirty="0">
-              <a:solidFill>
-                <a:srgbClr val="FF0000"/>
-              </a:solidFill>
-              <a:effectLst>
-                <a:outerShdw blurRad="38100" dist="38100" dir="2700000" algn="tl">
-                  <a:srgbClr val="000000">
-                    <a:alpha val="43137"/>
-                  </a:srgbClr>
-                </a:outerShdw>
-              </a:effectLst>
-            </a:endParaRPr>
-          </a:p>
-        </p:txBody>
-      </p:sp>
-      <p:sp>
-        <p:nvSpPr>
-          <p:cNvPr id="3" name="副標題 2"/>
-          <p:cNvSpPr>
-            <a:spLocks noGrp="1"/>
-          </p:cNvSpPr>
-          <p:nvPr>
-            <p:ph type="subTitle" idx="1"/>
-          </p:nvPr>
-        </p:nvSpPr>
-        <p:spPr>
-          <a:xfrm>
-            <a:off x="1371600" y="1785926"/>
-            <a:ext cx="6400800" cy="3852874"/>
-          </a:xfrm>
-        </p:spPr>
-        <p:txBody>
-          <a:bodyPr>
-            <a:noAutofit/>
-          </a:bodyPr>
-          <a:lstStyle/>
-          <a:p>
-            <a:r>
-              <a:rPr lang="zh-TW" altLang="en-US" sz="4000" b="1" dirty="0" smtClean="0">
-                <a:solidFill>
-                  <a:srgbClr val="FF0000"/>
-                </a:solidFill>
-              </a:rPr>
-              <a:t>感謝祢的十字架</a:t>
-            </a:r>
-            <a:endParaRPr lang="en-US" altLang="zh-TW" sz="4000" b="1" dirty="0" smtClean="0">
-              <a:solidFill>
-                <a:srgbClr val="FF0000"/>
-              </a:solidFill>
-            </a:endParaRPr>
-          </a:p>
-          <a:p>
-            <a:r>
-              <a:rPr lang="zh-TW" altLang="en-US" sz="4000" b="1" dirty="0" smtClean="0">
-                <a:solidFill>
-                  <a:srgbClr val="FF0000"/>
-                </a:solidFill>
-              </a:rPr>
-              <a:t>感謝祢付上代價</a:t>
-            </a:r>
-            <a:endParaRPr lang="en-US" altLang="zh-TW" sz="4000" b="1" dirty="0" smtClean="0">
-              <a:solidFill>
-                <a:srgbClr val="FF0000"/>
-              </a:solidFill>
-            </a:endParaRPr>
-          </a:p>
-          <a:p>
-            <a:r>
-              <a:rPr lang="zh-TW" altLang="en-US" sz="4000" b="1" dirty="0" smtClean="0">
-                <a:solidFill>
-                  <a:srgbClr val="FF0000"/>
-                </a:solidFill>
-              </a:rPr>
-              <a:t>擔當我罪和羞愧           </a:t>
-            </a:r>
-            <a:endParaRPr lang="en-US" altLang="zh-TW" sz="4000" b="1" dirty="0" smtClean="0">
-              <a:solidFill>
-                <a:srgbClr val="FF0000"/>
-              </a:solidFill>
-            </a:endParaRPr>
-          </a:p>
-          <a:p>
-            <a:r>
-              <a:rPr lang="zh-TW" altLang="en-US" sz="4000" b="1" dirty="0" smtClean="0">
-                <a:solidFill>
-                  <a:srgbClr val="FF0000"/>
-                </a:solidFill>
-              </a:rPr>
-              <a:t>使我完全</a:t>
-            </a:r>
-            <a:endParaRPr lang="en-US" altLang="zh-TW" sz="4000" b="1" dirty="0" smtClean="0">
-              <a:solidFill>
-                <a:srgbClr val="FF0000"/>
-              </a:solidFill>
-            </a:endParaRPr>
-          </a:p>
-          <a:p>
-            <a:r>
-              <a:rPr lang="zh-TW" altLang="en-US" sz="4000" b="1" dirty="0" smtClean="0">
-                <a:solidFill>
-                  <a:srgbClr val="FF0000"/>
-                </a:solidFill>
-              </a:rPr>
-              <a:t>賜下奇妙恩典 </a:t>
-            </a:r>
-            <a:endParaRPr lang="en-US" altLang="zh-TW" sz="4000" b="1" dirty="0" smtClean="0">
-              <a:solidFill>
-                <a:srgbClr val="FF0000"/>
-              </a:solidFill>
-            </a:endParaRPr>
-          </a:p>
-          <a:p>
-            <a:endParaRPr lang="en-US" altLang="zh-TW" sz="4000" b="1" dirty="0" smtClean="0">
-              <a:solidFill>
-                <a:srgbClr val="FF0000"/>
-              </a:solidFill>
-            </a:endParaRPr>
           </a:p>
         </p:txBody>
       </p:sp>
     </p:spTree>
+    <p:extLst>
+      <p:ext uri="{BB962C8B-B14F-4D97-AF65-F5344CB8AC3E}">
+        <p14:creationId xmlns:p14="http://schemas.microsoft.com/office/powerpoint/2010/main" val="388492399"/>
+      </p:ext>
+    </p:extLst>
   </p:cSld>
   <p:clrMapOvr>
     <a:masterClrMapping/>
@@ -3208,7 +3197,13 @@
   <p:cSld>
     <p:spTree>
       <p:nvGrpSpPr>
-        <p:cNvPr id="1" name=""/>
+        <p:cNvPr id="1" name="">
+          <a:extLst>
+            <a:ext uri="{FF2B5EF4-FFF2-40B4-BE49-F238E27FC236}">
+              <a16:creationId xmlns:a16="http://schemas.microsoft.com/office/drawing/2014/main" id="{499F6A04-361B-D03C-72FC-83746A3861FC}"/>
+            </a:ext>
+          </a:extLst>
+        </p:cNvPr>
         <p:cNvGrpSpPr/>
         <p:nvPr/>
       </p:nvGrpSpPr>
@@ -3222,203 +3217,137 @@
       </p:grpSpPr>
       <p:sp>
         <p:nvSpPr>
-          <p:cNvPr id="2" name="標題 1"/>
-          <p:cNvSpPr>
-            <a:spLocks noGrp="1"/>
-          </p:cNvSpPr>
-          <p:nvPr>
-            <p:ph type="ctrTitle"/>
+          <p:cNvPr id="5" name="內容版面配置區 4">
+            <a:extLst>
+              <a:ext uri="{FF2B5EF4-FFF2-40B4-BE49-F238E27FC236}">
+                <a16:creationId xmlns:a16="http://schemas.microsoft.com/office/drawing/2014/main" id="{EE77592B-EE8B-614D-4160-CDFC7BCE80DB}"/>
+              </a:ext>
+            </a:extLst>
+          </p:cNvPr>
+          <p:cNvSpPr>
+            <a:spLocks noGrp="1"/>
+          </p:cNvSpPr>
+          <p:nvPr>
+            <p:ph idx="1"/>
           </p:nvPr>
         </p:nvSpPr>
         <p:spPr>
           <a:xfrm>
-            <a:off x="571472" y="428604"/>
-            <a:ext cx="7772400" cy="1470025"/>
+            <a:off x="0" y="2084851"/>
+            <a:ext cx="12192000" cy="2404863"/>
           </a:xfrm>
         </p:spPr>
         <p:txBody>
-          <a:bodyPr>
+          <a:bodyPr anchor="ctr">
             <a:normAutofit/>
           </a:bodyPr>
           <a:lstStyle/>
           <a:p>
-            <a:r>
-              <a:rPr lang="zh-TW" altLang="en-US" sz="6000" b="1" dirty="0" smtClean="0">
-                <a:solidFill>
-                  <a:srgbClr val="FF0000"/>
-                </a:solidFill>
-                <a:effectLst>
-                  <a:outerShdw blurRad="38100" dist="38100" dir="2700000" algn="tl">
-                    <a:srgbClr val="000000">
-                      <a:alpha val="43137"/>
-                    </a:srgbClr>
-                  </a:outerShdw>
-                </a:effectLst>
+            <a:pPr algn="ctr">
+              <a:buNone/>
+            </a:pPr>
+            <a:r>
+              <a:rPr lang="zh-TW" altLang="en-US" sz="6400" b="1" dirty="0">
+                <a:solidFill>
+                  <a:srgbClr val="000066"/>
+                </a:solidFill>
+                <a:latin typeface="微軟正黑體" pitchFamily="34" charset="-120"/>
+                <a:ea typeface="微軟正黑體" pitchFamily="34" charset="-120"/>
               </a:rPr>
-              <a:t>神羔羊配得</a:t>
-            </a:r>
-            <a:endParaRPr lang="zh-TW" altLang="en-US" sz="6000" b="1" dirty="0">
-              <a:solidFill>
-                <a:srgbClr val="FF0000"/>
-              </a:solidFill>
-              <a:effectLst>
-                <a:outerShdw blurRad="38100" dist="38100" dir="2700000" algn="tl">
-                  <a:srgbClr val="000000">
-                    <a:alpha val="43137"/>
-                  </a:srgbClr>
-                </a:outerShdw>
-              </a:effectLst>
-            </a:endParaRPr>
-          </a:p>
-        </p:txBody>
-      </p:sp>
-      <p:sp>
-        <p:nvSpPr>
-          <p:cNvPr id="3" name="副標題 2"/>
-          <p:cNvSpPr>
-            <a:spLocks noGrp="1"/>
-          </p:cNvSpPr>
-          <p:nvPr>
-            <p:ph type="subTitle" idx="1"/>
-          </p:nvPr>
+              <a:t>感謝祢的十字架</a:t>
+            </a:r>
+          </a:p>
+          <a:p>
+            <a:pPr algn="ctr">
+              <a:buNone/>
+            </a:pPr>
+            <a:r>
+              <a:rPr lang="zh-TW" altLang="en-US" sz="6400" b="1" dirty="0">
+                <a:solidFill>
+                  <a:srgbClr val="000066"/>
+                </a:solidFill>
+                <a:latin typeface="微軟正黑體" pitchFamily="34" charset="-120"/>
+                <a:ea typeface="微軟正黑體" pitchFamily="34" charset="-120"/>
+              </a:rPr>
+              <a:t>感謝祢付上代價</a:t>
+            </a:r>
+          </a:p>
+        </p:txBody>
+      </p:sp>
+      <p:sp>
+        <p:nvSpPr>
+          <p:cNvPr id="3" name="TextBox 2">
+            <a:extLst>
+              <a:ext uri="{FF2B5EF4-FFF2-40B4-BE49-F238E27FC236}">
+                <a16:creationId xmlns:a16="http://schemas.microsoft.com/office/drawing/2014/main" id="{FA175DD0-F211-14DE-420F-4A50F79B6BD2}"/>
+              </a:ext>
+            </a:extLst>
+          </p:cNvPr>
+          <p:cNvSpPr txBox="1"/>
+          <p:nvPr/>
         </p:nvSpPr>
         <p:spPr>
           <a:xfrm>
-            <a:off x="785786" y="2000240"/>
-            <a:ext cx="7858180" cy="4286280"/>
+            <a:off x="0" y="5157193"/>
+            <a:ext cx="12192000" cy="584775"/>
           </a:xfrm>
+          <a:prstGeom prst="rect">
+            <a:avLst/>
+          </a:prstGeom>
+          <a:noFill/>
         </p:spPr>
         <p:txBody>
-          <a:bodyPr>
-            <a:normAutofit/>
+          <a:bodyPr wrap="square" rtlCol="0">
+            <a:spAutoFit/>
           </a:bodyPr>
           <a:lstStyle/>
           <a:p>
-            <a:r>
-              <a:rPr lang="zh-TW" altLang="en-US" sz="4000" b="1" dirty="0" smtClean="0">
-                <a:solidFill>
-                  <a:srgbClr val="FF0000"/>
-                </a:solidFill>
+            <a:pPr algn="ctr"/>
+            <a:r>
+              <a:rPr lang="en-US" sz="3200" b="1" dirty="0">
+                <a:solidFill>
+                  <a:srgbClr val="000066"/>
+                </a:solidFill>
+                <a:latin typeface="Microsoft JhengHei" panose="020B0604030504040204" pitchFamily="34" charset="-120"/>
+                <a:ea typeface="Microsoft JhengHei" panose="020B0604030504040204" pitchFamily="34" charset="-120"/>
               </a:rPr>
-              <a:t>感謝祢無比大愛</a:t>
-            </a:r>
-            <a:endParaRPr lang="en-US" altLang="zh-TW" sz="4000" dirty="0" smtClean="0">
+              <a:t>( </a:t>
+            </a:r>
+            <a:r>
+              <a:rPr lang="zh-CN" altLang="en-US" sz="3200" b="1" dirty="0">
+                <a:solidFill>
+                  <a:srgbClr val="000066"/>
+                </a:solidFill>
+                <a:latin typeface="Microsoft JhengHei" panose="020B0604030504040204" pitchFamily="34" charset="-120"/>
+                <a:ea typeface="Microsoft JhengHei" panose="020B0604030504040204" pitchFamily="34" charset="-120"/>
+              </a:rPr>
+              <a:t>正歌</a:t>
+            </a:r>
+            <a:r>
+              <a:rPr lang="en-US" sz="3200" b="1" dirty="0">
+                <a:solidFill>
+                  <a:srgbClr val="000066"/>
+                </a:solidFill>
+                <a:latin typeface="Microsoft JhengHei" panose="020B0604030504040204" pitchFamily="34" charset="-120"/>
+                <a:ea typeface="Microsoft JhengHei" panose="020B0604030504040204" pitchFamily="34" charset="-120"/>
+              </a:rPr>
+              <a:t> )</a:t>
+            </a:r>
+            <a:endParaRPr lang="vi-VN" sz="3200" b="1" dirty="0">
               <a:solidFill>
-                <a:srgbClr val="FF0000"/>
+                <a:srgbClr val="000066"/>
               </a:solidFill>
+              <a:ea typeface="Microsoft JhengHei" panose="020B0604030504040204" pitchFamily="34" charset="-120"/>
             </a:endParaRPr>
           </a:p>
-          <a:p>
-            <a:r>
-              <a:rPr lang="zh-TW" altLang="en-US" sz="4000" b="1" dirty="0" smtClean="0">
-                <a:solidFill>
-                  <a:srgbClr val="FF0000"/>
-                </a:solidFill>
-              </a:rPr>
-              <a:t>感謝</a:t>
-            </a:r>
-            <a:r>
-              <a:rPr lang="zh-TW" altLang="en-US" sz="4000" b="1" dirty="0">
-                <a:solidFill>
-                  <a:srgbClr val="FF0000"/>
-                </a:solidFill>
-              </a:rPr>
-              <a:t>祢釘痕雙手 </a:t>
-            </a:r>
-            <a:r>
-              <a:rPr lang="zh-TW" altLang="en-US" sz="4000" b="1" dirty="0" smtClean="0">
-                <a:solidFill>
-                  <a:srgbClr val="FF0000"/>
-                </a:solidFill>
-              </a:rPr>
-              <a:t>     </a:t>
-            </a:r>
-            <a:endParaRPr lang="en-US" altLang="zh-TW" sz="4000" b="1" dirty="0" smtClean="0">
-              <a:solidFill>
-                <a:srgbClr val="FF0000"/>
-              </a:solidFill>
-            </a:endParaRPr>
-          </a:p>
-          <a:p>
-            <a:r>
-              <a:rPr lang="zh-TW" altLang="en-US" sz="4000" b="1" dirty="0" smtClean="0">
-                <a:solidFill>
-                  <a:srgbClr val="FF0000"/>
-                </a:solidFill>
-              </a:rPr>
-              <a:t>寶</a:t>
-            </a:r>
-            <a:r>
-              <a:rPr lang="zh-TW" altLang="en-US" sz="4000" b="1" dirty="0">
-                <a:solidFill>
-                  <a:srgbClr val="FF0000"/>
-                </a:solidFill>
-              </a:rPr>
-              <a:t>血洗淨我汙穢 </a:t>
-            </a:r>
-            <a:endParaRPr lang="en-US" altLang="zh-TW" sz="4000" b="1" dirty="0" smtClean="0">
-              <a:solidFill>
-                <a:srgbClr val="FF0000"/>
-              </a:solidFill>
-            </a:endParaRPr>
-          </a:p>
-          <a:p>
-            <a:r>
-              <a:rPr lang="zh-TW" altLang="en-US" sz="4000" b="1" dirty="0" smtClean="0">
-                <a:solidFill>
-                  <a:srgbClr val="FF0000"/>
-                </a:solidFill>
-              </a:rPr>
-              <a:t>使</a:t>
-            </a:r>
-            <a:r>
-              <a:rPr lang="zh-TW" altLang="en-US" sz="4000" b="1" dirty="0">
-                <a:solidFill>
-                  <a:srgbClr val="FF0000"/>
-                </a:solidFill>
-              </a:rPr>
-              <a:t>我瞭解 </a:t>
-            </a:r>
-            <a:r>
-              <a:rPr lang="zh-TW" altLang="en-US" sz="4000" b="1" dirty="0" smtClean="0">
-                <a:solidFill>
-                  <a:srgbClr val="FF0000"/>
-                </a:solidFill>
-              </a:rPr>
-              <a:t>    </a:t>
-            </a:r>
-            <a:endParaRPr lang="en-US" altLang="zh-TW" sz="4000" b="1" dirty="0" smtClean="0">
-              <a:solidFill>
-                <a:srgbClr val="FF0000"/>
-              </a:solidFill>
-            </a:endParaRPr>
-          </a:p>
-          <a:p>
-            <a:r>
-              <a:rPr lang="zh-TW" altLang="en-US" sz="4000" b="1" dirty="0" smtClean="0">
-                <a:solidFill>
-                  <a:srgbClr val="FF0000"/>
-                </a:solidFill>
-              </a:rPr>
-              <a:t>祢</a:t>
-            </a:r>
-            <a:r>
-              <a:rPr lang="zh-TW" altLang="en-US" sz="4000" b="1" dirty="0">
-                <a:solidFill>
-                  <a:srgbClr val="FF0000"/>
-                </a:solidFill>
-              </a:rPr>
-              <a:t>完全包容赦免 </a:t>
-            </a:r>
-            <a:endParaRPr lang="en-US" altLang="zh-TW" sz="4000" b="1" dirty="0" smtClean="0">
-              <a:solidFill>
-                <a:srgbClr val="FF0000"/>
-              </a:solidFill>
-            </a:endParaRPr>
-          </a:p>
         </p:txBody>
       </p:sp>
     </p:spTree>
+    <p:extLst>
+      <p:ext uri="{BB962C8B-B14F-4D97-AF65-F5344CB8AC3E}">
+        <p14:creationId xmlns:p14="http://schemas.microsoft.com/office/powerpoint/2010/main" val="3885075056"/>
+      </p:ext>
+    </p:extLst>
   </p:cSld>
   <p:clrMapOvr>
     <a:masterClrMapping/>
@@ -3431,7 +3360,13 @@
   <p:cSld>
     <p:spTree>
       <p:nvGrpSpPr>
-        <p:cNvPr id="1" name=""/>
+        <p:cNvPr id="1" name="">
+          <a:extLst>
+            <a:ext uri="{FF2B5EF4-FFF2-40B4-BE49-F238E27FC236}">
+              <a16:creationId xmlns:a16="http://schemas.microsoft.com/office/drawing/2014/main" id="{C63FFEA0-B924-E1C2-0FDB-C0771349841A}"/>
+            </a:ext>
+          </a:extLst>
+        </p:cNvPr>
         <p:cNvGrpSpPr/>
         <p:nvPr/>
       </p:nvGrpSpPr>
@@ -3445,147 +3380,137 @@
       </p:grpSpPr>
       <p:sp>
         <p:nvSpPr>
-          <p:cNvPr id="2" name="標題 1"/>
-          <p:cNvSpPr>
-            <a:spLocks noGrp="1"/>
-          </p:cNvSpPr>
-          <p:nvPr>
-            <p:ph type="ctrTitle"/>
+          <p:cNvPr id="5" name="內容版面配置區 4">
+            <a:extLst>
+              <a:ext uri="{FF2B5EF4-FFF2-40B4-BE49-F238E27FC236}">
+                <a16:creationId xmlns:a16="http://schemas.microsoft.com/office/drawing/2014/main" id="{ABCA2FC0-DE1E-10B9-3B4F-E88940AE2AF4}"/>
+              </a:ext>
+            </a:extLst>
+          </p:cNvPr>
+          <p:cNvSpPr>
+            <a:spLocks noGrp="1"/>
+          </p:cNvSpPr>
+          <p:nvPr>
+            <p:ph idx="1"/>
           </p:nvPr>
         </p:nvSpPr>
         <p:spPr>
           <a:xfrm>
-            <a:off x="642910" y="642918"/>
-            <a:ext cx="7772400" cy="1470025"/>
+            <a:off x="0" y="2084851"/>
+            <a:ext cx="12192000" cy="2404863"/>
           </a:xfrm>
         </p:spPr>
         <p:txBody>
-          <a:bodyPr>
+          <a:bodyPr anchor="ctr">
             <a:normAutofit/>
           </a:bodyPr>
           <a:lstStyle/>
           <a:p>
-            <a:r>
-              <a:rPr lang="zh-TW" altLang="en-US" sz="6000" b="1" dirty="0" smtClean="0">
-                <a:solidFill>
-                  <a:srgbClr val="FF0000"/>
-                </a:solidFill>
-                <a:effectLst>
-                  <a:outerShdw blurRad="38100" dist="38100" dir="2700000" algn="tl">
-                    <a:srgbClr val="000000">
-                      <a:alpha val="43137"/>
-                    </a:srgbClr>
-                  </a:outerShdw>
-                </a:effectLst>
+            <a:pPr algn="ctr">
+              <a:buNone/>
+            </a:pPr>
+            <a:r>
+              <a:rPr lang="zh-TW" altLang="en-US" sz="6400" b="1" dirty="0">
+                <a:solidFill>
+                  <a:srgbClr val="000066"/>
+                </a:solidFill>
+                <a:latin typeface="微軟正黑體" pitchFamily="34" charset="-120"/>
+                <a:ea typeface="微軟正黑體" pitchFamily="34" charset="-120"/>
               </a:rPr>
-              <a:t>神羔羊配得</a:t>
-            </a:r>
-            <a:endParaRPr lang="zh-TW" altLang="en-US" sz="6000" b="1" dirty="0">
-              <a:solidFill>
-                <a:srgbClr val="FF0000"/>
-              </a:solidFill>
-              <a:effectLst>
-                <a:outerShdw blurRad="38100" dist="38100" dir="2700000" algn="tl">
-                  <a:srgbClr val="000000">
-                    <a:alpha val="43137"/>
-                  </a:srgbClr>
-                </a:outerShdw>
-              </a:effectLst>
-            </a:endParaRPr>
-          </a:p>
-        </p:txBody>
-      </p:sp>
-      <p:sp>
-        <p:nvSpPr>
-          <p:cNvPr id="3" name="副標題 2"/>
-          <p:cNvSpPr>
-            <a:spLocks noGrp="1"/>
-          </p:cNvSpPr>
-          <p:nvPr>
-            <p:ph type="subTitle" idx="1"/>
-          </p:nvPr>
+              <a:t>擔當我罪和羞愧           </a:t>
+            </a:r>
+          </a:p>
+          <a:p>
+            <a:pPr algn="ctr">
+              <a:buNone/>
+            </a:pPr>
+            <a:r>
+              <a:rPr lang="zh-TW" altLang="en-US" sz="6400" b="1" dirty="0">
+                <a:solidFill>
+                  <a:srgbClr val="000066"/>
+                </a:solidFill>
+                <a:latin typeface="微軟正黑體" pitchFamily="34" charset="-120"/>
+                <a:ea typeface="微軟正黑體" pitchFamily="34" charset="-120"/>
+              </a:rPr>
+              <a:t>使我完全  賜下奇妙恩典 </a:t>
+            </a:r>
+          </a:p>
+        </p:txBody>
+      </p:sp>
+      <p:sp>
+        <p:nvSpPr>
+          <p:cNvPr id="3" name="TextBox 2">
+            <a:extLst>
+              <a:ext uri="{FF2B5EF4-FFF2-40B4-BE49-F238E27FC236}">
+                <a16:creationId xmlns:a16="http://schemas.microsoft.com/office/drawing/2014/main" id="{64209047-60E5-621D-0BAE-FE06E94D2F7E}"/>
+              </a:ext>
+            </a:extLst>
+          </p:cNvPr>
+          <p:cNvSpPr txBox="1"/>
+          <p:nvPr/>
         </p:nvSpPr>
         <p:spPr>
           <a:xfrm>
-            <a:off x="785786" y="2428868"/>
-            <a:ext cx="7858180" cy="4071966"/>
+            <a:off x="0" y="5157193"/>
+            <a:ext cx="12192000" cy="584775"/>
           </a:xfrm>
+          <a:prstGeom prst="rect">
+            <a:avLst/>
+          </a:prstGeom>
+          <a:noFill/>
         </p:spPr>
         <p:txBody>
-          <a:bodyPr>
-            <a:normAutofit/>
+          <a:bodyPr wrap="square" rtlCol="0">
+            <a:spAutoFit/>
           </a:bodyPr>
           <a:lstStyle/>
           <a:p>
-            <a:r>
-              <a:rPr lang="zh-TW" altLang="en-US" sz="4300" b="1" dirty="0" smtClean="0">
-                <a:solidFill>
-                  <a:srgbClr val="FF0000"/>
-                </a:solidFill>
+            <a:pPr algn="ctr"/>
+            <a:r>
+              <a:rPr lang="en-US" sz="3200" b="1" dirty="0">
+                <a:solidFill>
+                  <a:srgbClr val="000066"/>
+                </a:solidFill>
+                <a:latin typeface="Microsoft JhengHei" panose="020B0604030504040204" pitchFamily="34" charset="-120"/>
+                <a:ea typeface="Microsoft JhengHei" panose="020B0604030504040204" pitchFamily="34" charset="-120"/>
               </a:rPr>
-              <a:t>**** 神羔羊配得 </a:t>
-            </a:r>
-            <a:endParaRPr lang="en-US" altLang="zh-TW" sz="4300" b="1" dirty="0">
+              <a:t>( </a:t>
+            </a:r>
+            <a:r>
+              <a:rPr lang="zh-CN" altLang="en-US" sz="3200" b="1" dirty="0">
+                <a:solidFill>
+                  <a:srgbClr val="000066"/>
+                </a:solidFill>
+                <a:latin typeface="Microsoft JhengHei" panose="020B0604030504040204" pitchFamily="34" charset="-120"/>
+                <a:ea typeface="Microsoft JhengHei" panose="020B0604030504040204" pitchFamily="34" charset="-120"/>
+              </a:rPr>
+              <a:t>正歌</a:t>
+            </a:r>
+            <a:r>
+              <a:rPr lang="en-US" sz="3200" b="1" dirty="0">
+                <a:solidFill>
+                  <a:srgbClr val="000066"/>
+                </a:solidFill>
+                <a:latin typeface="Microsoft JhengHei" panose="020B0604030504040204" pitchFamily="34" charset="-120"/>
+                <a:ea typeface="Microsoft JhengHei" panose="020B0604030504040204" pitchFamily="34" charset="-120"/>
+              </a:rPr>
+              <a:t> )</a:t>
+            </a:r>
+            <a:endParaRPr lang="vi-VN" sz="3200" b="1" dirty="0">
               <a:solidFill>
-                <a:srgbClr val="FF0000"/>
+                <a:srgbClr val="000066"/>
               </a:solidFill>
+              <a:ea typeface="Microsoft JhengHei" panose="020B0604030504040204" pitchFamily="34" charset="-120"/>
             </a:endParaRPr>
           </a:p>
-          <a:p>
-            <a:r>
-              <a:rPr lang="zh-TW" altLang="en-US" sz="4300" b="1" dirty="0" smtClean="0">
-                <a:solidFill>
-                  <a:srgbClr val="FF0000"/>
-                </a:solidFill>
-              </a:rPr>
-              <a:t>坐在寶座上 </a:t>
-            </a:r>
-            <a:endParaRPr lang="en-US" altLang="zh-TW" sz="4300" b="1" dirty="0" smtClean="0">
-              <a:solidFill>
-                <a:srgbClr val="FF0000"/>
-              </a:solidFill>
-            </a:endParaRPr>
-          </a:p>
-          <a:p>
-            <a:r>
-              <a:rPr lang="zh-TW" altLang="en-US" sz="4300" b="1" dirty="0" smtClean="0">
-                <a:solidFill>
-                  <a:srgbClr val="FF0000"/>
-                </a:solidFill>
-              </a:rPr>
-              <a:t>頭戴著尊貴冠冕        </a:t>
-            </a:r>
-            <a:endParaRPr lang="en-US" altLang="zh-TW" sz="4300" b="1" dirty="0" smtClean="0">
-              <a:solidFill>
-                <a:srgbClr val="FF0000"/>
-              </a:solidFill>
-            </a:endParaRPr>
-          </a:p>
-          <a:p>
-            <a:r>
-              <a:rPr lang="zh-TW" altLang="en-US" sz="4300" b="1" dirty="0" smtClean="0">
-                <a:solidFill>
-                  <a:srgbClr val="FF0000"/>
-                </a:solidFill>
-              </a:rPr>
-              <a:t>祢作王到永遠 </a:t>
-            </a:r>
-            <a:endParaRPr lang="en-US" altLang="zh-TW" sz="4300" b="1" dirty="0" smtClean="0">
-              <a:solidFill>
-                <a:srgbClr val="FF0000"/>
-              </a:solidFill>
-            </a:endParaRPr>
-          </a:p>
-          <a:p>
-            <a:endParaRPr lang="zh-TW" altLang="en-US" b="1" dirty="0">
-              <a:solidFill>
-                <a:srgbClr val="FF0000"/>
-              </a:solidFill>
-            </a:endParaRPr>
-          </a:p>
         </p:txBody>
       </p:sp>
     </p:spTree>
+    <p:extLst>
+      <p:ext uri="{BB962C8B-B14F-4D97-AF65-F5344CB8AC3E}">
+        <p14:creationId xmlns:p14="http://schemas.microsoft.com/office/powerpoint/2010/main" val="3174405763"/>
+      </p:ext>
+    </p:extLst>
   </p:cSld>
   <p:clrMapOvr>
     <a:masterClrMapping/>
@@ -3598,7 +3523,13 @@
   <p:cSld>
     <p:spTree>
       <p:nvGrpSpPr>
-        <p:cNvPr id="1" name=""/>
+        <p:cNvPr id="1" name="">
+          <a:extLst>
+            <a:ext uri="{FF2B5EF4-FFF2-40B4-BE49-F238E27FC236}">
+              <a16:creationId xmlns:a16="http://schemas.microsoft.com/office/drawing/2014/main" id="{784D8A25-8CA4-CC42-5561-699D5C2A9D76}"/>
+            </a:ext>
+          </a:extLst>
+        </p:cNvPr>
         <p:cNvGrpSpPr/>
         <p:nvPr/>
       </p:nvGrpSpPr>
@@ -3612,157 +3543,816 @@
       </p:grpSpPr>
       <p:sp>
         <p:nvSpPr>
-          <p:cNvPr id="2" name="標題 1"/>
-          <p:cNvSpPr>
-            <a:spLocks noGrp="1"/>
-          </p:cNvSpPr>
-          <p:nvPr>
-            <p:ph type="ctrTitle"/>
+          <p:cNvPr id="5" name="內容版面配置區 4">
+            <a:extLst>
+              <a:ext uri="{FF2B5EF4-FFF2-40B4-BE49-F238E27FC236}">
+                <a16:creationId xmlns:a16="http://schemas.microsoft.com/office/drawing/2014/main" id="{7FDB2625-41A8-ADFD-9247-67397E786FDD}"/>
+              </a:ext>
+            </a:extLst>
+          </p:cNvPr>
+          <p:cNvSpPr>
+            <a:spLocks noGrp="1"/>
+          </p:cNvSpPr>
+          <p:nvPr>
+            <p:ph idx="1"/>
           </p:nvPr>
         </p:nvSpPr>
         <p:spPr>
           <a:xfrm>
-            <a:off x="642910" y="500042"/>
-            <a:ext cx="7772400" cy="1470025"/>
+            <a:off x="0" y="2084851"/>
+            <a:ext cx="12192000" cy="2404863"/>
           </a:xfrm>
         </p:spPr>
         <p:txBody>
-          <a:bodyPr>
+          <a:bodyPr anchor="ctr">
             <a:normAutofit/>
           </a:bodyPr>
           <a:lstStyle/>
           <a:p>
-            <a:r>
-              <a:rPr lang="zh-TW" altLang="en-US" sz="6000" b="1" dirty="0" smtClean="0">
-                <a:solidFill>
-                  <a:srgbClr val="FF0000"/>
-                </a:solidFill>
-                <a:effectLst>
-                  <a:outerShdw blurRad="38100" dist="38100" dir="2700000" algn="tl">
-                    <a:srgbClr val="000000">
-                      <a:alpha val="43137"/>
-                    </a:srgbClr>
-                  </a:outerShdw>
-                </a:effectLst>
+            <a:pPr algn="ctr">
+              <a:buNone/>
+            </a:pPr>
+            <a:r>
+              <a:rPr lang="zh-TW" altLang="en-US" sz="6400" b="1" dirty="0">
+                <a:solidFill>
+                  <a:srgbClr val="000066"/>
+                </a:solidFill>
+                <a:latin typeface="微軟正黑體" pitchFamily="34" charset="-120"/>
+                <a:ea typeface="微軟正黑體" pitchFamily="34" charset="-120"/>
+              </a:rPr>
+              <a:t>感謝祢無比大愛</a:t>
+            </a:r>
+          </a:p>
+          <a:p>
+            <a:pPr algn="ctr">
+              <a:buNone/>
+            </a:pPr>
+            <a:r>
+              <a:rPr lang="zh-TW" altLang="en-US" sz="6400" b="1" dirty="0">
+                <a:solidFill>
+                  <a:srgbClr val="000066"/>
+                </a:solidFill>
+                <a:latin typeface="微軟正黑體" pitchFamily="34" charset="-120"/>
+                <a:ea typeface="微軟正黑體" pitchFamily="34" charset="-120"/>
+              </a:rPr>
+              <a:t>感謝祢釘痕雙手</a:t>
+            </a:r>
+          </a:p>
+        </p:txBody>
+      </p:sp>
+      <p:sp>
+        <p:nvSpPr>
+          <p:cNvPr id="3" name="TextBox 2">
+            <a:extLst>
+              <a:ext uri="{FF2B5EF4-FFF2-40B4-BE49-F238E27FC236}">
+                <a16:creationId xmlns:a16="http://schemas.microsoft.com/office/drawing/2014/main" id="{FC559219-D725-B5DF-CA55-C0CBE121163A}"/>
+              </a:ext>
+            </a:extLst>
+          </p:cNvPr>
+          <p:cNvSpPr txBox="1"/>
+          <p:nvPr/>
+        </p:nvSpPr>
+        <p:spPr>
+          <a:xfrm>
+            <a:off x="0" y="5157193"/>
+            <a:ext cx="12192000" cy="584775"/>
+          </a:xfrm>
+          <a:prstGeom prst="rect">
+            <a:avLst/>
+          </a:prstGeom>
+          <a:noFill/>
+        </p:spPr>
+        <p:txBody>
+          <a:bodyPr wrap="square" rtlCol="0">
+            <a:spAutoFit/>
+          </a:bodyPr>
+          <a:lstStyle/>
+          <a:p>
+            <a:pPr algn="ctr"/>
+            <a:r>
+              <a:rPr lang="en-US" sz="3200" b="1" dirty="0">
+                <a:solidFill>
+                  <a:srgbClr val="000066"/>
+                </a:solidFill>
+                <a:latin typeface="Microsoft JhengHei" panose="020B0604030504040204" pitchFamily="34" charset="-120"/>
+                <a:ea typeface="Microsoft JhengHei" panose="020B0604030504040204" pitchFamily="34" charset="-120"/>
+              </a:rPr>
+              <a:t>( </a:t>
+            </a:r>
+            <a:r>
+              <a:rPr lang="zh-CN" altLang="en-US" sz="3200" b="1" dirty="0">
+                <a:solidFill>
+                  <a:srgbClr val="000066"/>
+                </a:solidFill>
+                <a:latin typeface="Microsoft JhengHei" panose="020B0604030504040204" pitchFamily="34" charset="-120"/>
+                <a:ea typeface="Microsoft JhengHei" panose="020B0604030504040204" pitchFamily="34" charset="-120"/>
+              </a:rPr>
+              <a:t>正歌</a:t>
+            </a:r>
+            <a:r>
+              <a:rPr lang="en-US" sz="3200" b="1" dirty="0">
+                <a:solidFill>
+                  <a:srgbClr val="000066"/>
+                </a:solidFill>
+                <a:latin typeface="Microsoft JhengHei" panose="020B0604030504040204" pitchFamily="34" charset="-120"/>
+                <a:ea typeface="Microsoft JhengHei" panose="020B0604030504040204" pitchFamily="34" charset="-120"/>
+              </a:rPr>
+              <a:t> )</a:t>
+            </a:r>
+            <a:endParaRPr lang="vi-VN" sz="3200" b="1" dirty="0">
+              <a:solidFill>
+                <a:srgbClr val="000066"/>
+              </a:solidFill>
+              <a:ea typeface="Microsoft JhengHei" panose="020B0604030504040204" pitchFamily="34" charset="-120"/>
+            </a:endParaRPr>
+          </a:p>
+        </p:txBody>
+      </p:sp>
+    </p:spTree>
+    <p:extLst>
+      <p:ext uri="{BB962C8B-B14F-4D97-AF65-F5344CB8AC3E}">
+        <p14:creationId xmlns:p14="http://schemas.microsoft.com/office/powerpoint/2010/main" val="4129522966"/>
+      </p:ext>
+    </p:extLst>
+  </p:cSld>
+  <p:clrMapOvr>
+    <a:masterClrMapping/>
+  </p:clrMapOvr>
+</p:sld>
+</file>
+
+<file path=ppt/slides/slide5.xml><?xml version="1.0" encoding="utf-8"?>
+<p:sld xmlns:a="http://schemas.openxmlformats.org/drawingml/2006/main" xmlns:r="http://schemas.openxmlformats.org/officeDocument/2006/relationships" xmlns:p="http://schemas.openxmlformats.org/presentationml/2006/main">
+  <p:cSld>
+    <p:spTree>
+      <p:nvGrpSpPr>
+        <p:cNvPr id="1" name="">
+          <a:extLst>
+            <a:ext uri="{FF2B5EF4-FFF2-40B4-BE49-F238E27FC236}">
+              <a16:creationId xmlns:a16="http://schemas.microsoft.com/office/drawing/2014/main" id="{D41F1586-31AF-1C63-0DF0-AD0DED082F31}"/>
+            </a:ext>
+          </a:extLst>
+        </p:cNvPr>
+        <p:cNvGrpSpPr/>
+        <p:nvPr/>
+      </p:nvGrpSpPr>
+      <p:grpSpPr>
+        <a:xfrm>
+          <a:off x="0" y="0"/>
+          <a:ext cx="0" cy="0"/>
+          <a:chOff x="0" y="0"/>
+          <a:chExt cx="0" cy="0"/>
+        </a:xfrm>
+      </p:grpSpPr>
+      <p:sp>
+        <p:nvSpPr>
+          <p:cNvPr id="5" name="內容版面配置區 4">
+            <a:extLst>
+              <a:ext uri="{FF2B5EF4-FFF2-40B4-BE49-F238E27FC236}">
+                <a16:creationId xmlns:a16="http://schemas.microsoft.com/office/drawing/2014/main" id="{AB631F85-CEFE-A3FC-DFFC-FECD96AB8942}"/>
+              </a:ext>
+            </a:extLst>
+          </p:cNvPr>
+          <p:cNvSpPr>
+            <a:spLocks noGrp="1"/>
+          </p:cNvSpPr>
+          <p:nvPr>
+            <p:ph idx="1"/>
+          </p:nvPr>
+        </p:nvSpPr>
+        <p:spPr>
+          <a:xfrm>
+            <a:off x="0" y="2084851"/>
+            <a:ext cx="12192000" cy="2404863"/>
+          </a:xfrm>
+        </p:spPr>
+        <p:txBody>
+          <a:bodyPr anchor="ctr">
+            <a:normAutofit/>
+          </a:bodyPr>
+          <a:lstStyle/>
+          <a:p>
+            <a:pPr algn="ctr">
+              <a:buNone/>
+            </a:pPr>
+            <a:r>
+              <a:rPr lang="zh-TW" altLang="en-US" sz="6400" b="1" dirty="0">
+                <a:solidFill>
+                  <a:srgbClr val="000066"/>
+                </a:solidFill>
+                <a:latin typeface="微軟正黑體" pitchFamily="34" charset="-120"/>
+                <a:ea typeface="微軟正黑體" pitchFamily="34" charset="-120"/>
+              </a:rPr>
+              <a:t>寶血洗淨我汙穢 </a:t>
+            </a:r>
+          </a:p>
+          <a:p>
+            <a:pPr algn="ctr">
+              <a:buNone/>
+            </a:pPr>
+            <a:r>
+              <a:rPr lang="zh-TW" altLang="en-US" sz="6400" b="1" dirty="0">
+                <a:solidFill>
+                  <a:srgbClr val="000066"/>
+                </a:solidFill>
+                <a:latin typeface="微軟正黑體" pitchFamily="34" charset="-120"/>
+                <a:ea typeface="微軟正黑體" pitchFamily="34" charset="-120"/>
+              </a:rPr>
+              <a:t>使我瞭解  祢完全包容赦免 </a:t>
+            </a:r>
+          </a:p>
+        </p:txBody>
+      </p:sp>
+      <p:sp>
+        <p:nvSpPr>
+          <p:cNvPr id="3" name="TextBox 2">
+            <a:extLst>
+              <a:ext uri="{FF2B5EF4-FFF2-40B4-BE49-F238E27FC236}">
+                <a16:creationId xmlns:a16="http://schemas.microsoft.com/office/drawing/2014/main" id="{EF8AF497-F2B3-1ECE-E728-1E25D9459966}"/>
+              </a:ext>
+            </a:extLst>
+          </p:cNvPr>
+          <p:cNvSpPr txBox="1"/>
+          <p:nvPr/>
+        </p:nvSpPr>
+        <p:spPr>
+          <a:xfrm>
+            <a:off x="0" y="5157193"/>
+            <a:ext cx="12192000" cy="584775"/>
+          </a:xfrm>
+          <a:prstGeom prst="rect">
+            <a:avLst/>
+          </a:prstGeom>
+          <a:noFill/>
+        </p:spPr>
+        <p:txBody>
+          <a:bodyPr wrap="square" rtlCol="0">
+            <a:spAutoFit/>
+          </a:bodyPr>
+          <a:lstStyle/>
+          <a:p>
+            <a:pPr algn="ctr"/>
+            <a:r>
+              <a:rPr lang="en-US" sz="3200" b="1" dirty="0">
+                <a:solidFill>
+                  <a:srgbClr val="000066"/>
+                </a:solidFill>
+                <a:latin typeface="Microsoft JhengHei" panose="020B0604030504040204" pitchFamily="34" charset="-120"/>
+                <a:ea typeface="Microsoft JhengHei" panose="020B0604030504040204" pitchFamily="34" charset="-120"/>
+              </a:rPr>
+              <a:t>( </a:t>
+            </a:r>
+            <a:r>
+              <a:rPr lang="zh-CN" altLang="en-US" sz="3200" b="1" dirty="0">
+                <a:solidFill>
+                  <a:srgbClr val="000066"/>
+                </a:solidFill>
+                <a:latin typeface="Microsoft JhengHei" panose="020B0604030504040204" pitchFamily="34" charset="-120"/>
+                <a:ea typeface="Microsoft JhengHei" panose="020B0604030504040204" pitchFamily="34" charset="-120"/>
+              </a:rPr>
+              <a:t>正歌</a:t>
+            </a:r>
+            <a:r>
+              <a:rPr lang="en-US" sz="3200" b="1" dirty="0">
+                <a:solidFill>
+                  <a:srgbClr val="000066"/>
+                </a:solidFill>
+                <a:latin typeface="Microsoft JhengHei" panose="020B0604030504040204" pitchFamily="34" charset="-120"/>
+                <a:ea typeface="Microsoft JhengHei" panose="020B0604030504040204" pitchFamily="34" charset="-120"/>
+              </a:rPr>
+              <a:t> )</a:t>
+            </a:r>
+            <a:endParaRPr lang="vi-VN" sz="3200" b="1" dirty="0">
+              <a:solidFill>
+                <a:srgbClr val="000066"/>
+              </a:solidFill>
+              <a:ea typeface="Microsoft JhengHei" panose="020B0604030504040204" pitchFamily="34" charset="-120"/>
+            </a:endParaRPr>
+          </a:p>
+        </p:txBody>
+      </p:sp>
+    </p:spTree>
+    <p:extLst>
+      <p:ext uri="{BB962C8B-B14F-4D97-AF65-F5344CB8AC3E}">
+        <p14:creationId xmlns:p14="http://schemas.microsoft.com/office/powerpoint/2010/main" val="969149590"/>
+      </p:ext>
+    </p:extLst>
+  </p:cSld>
+  <p:clrMapOvr>
+    <a:masterClrMapping/>
+  </p:clrMapOvr>
+</p:sld>
+</file>
+
+<file path=ppt/slides/slide6.xml><?xml version="1.0" encoding="utf-8"?>
+<p:sld xmlns:a="http://schemas.openxmlformats.org/drawingml/2006/main" xmlns:r="http://schemas.openxmlformats.org/officeDocument/2006/relationships" xmlns:p="http://schemas.openxmlformats.org/presentationml/2006/main">
+  <p:cSld>
+    <p:spTree>
+      <p:nvGrpSpPr>
+        <p:cNvPr id="1" name="">
+          <a:extLst>
+            <a:ext uri="{FF2B5EF4-FFF2-40B4-BE49-F238E27FC236}">
+              <a16:creationId xmlns:a16="http://schemas.microsoft.com/office/drawing/2014/main" id="{35190232-0C71-07E9-321E-C48A6EED8A37}"/>
+            </a:ext>
+          </a:extLst>
+        </p:cNvPr>
+        <p:cNvGrpSpPr/>
+        <p:nvPr/>
+      </p:nvGrpSpPr>
+      <p:grpSpPr>
+        <a:xfrm>
+          <a:off x="0" y="0"/>
+          <a:ext cx="0" cy="0"/>
+          <a:chOff x="0" y="0"/>
+          <a:chExt cx="0" cy="0"/>
+        </a:xfrm>
+      </p:grpSpPr>
+      <p:sp>
+        <p:nvSpPr>
+          <p:cNvPr id="5" name="內容版面配置區 4">
+            <a:extLst>
+              <a:ext uri="{FF2B5EF4-FFF2-40B4-BE49-F238E27FC236}">
+                <a16:creationId xmlns:a16="http://schemas.microsoft.com/office/drawing/2014/main" id="{131696D4-49DE-81D5-86E4-C1295A783D5A}"/>
+              </a:ext>
+            </a:extLst>
+          </p:cNvPr>
+          <p:cNvSpPr>
+            <a:spLocks noGrp="1"/>
+          </p:cNvSpPr>
+          <p:nvPr>
+            <p:ph idx="1"/>
+          </p:nvPr>
+        </p:nvSpPr>
+        <p:spPr>
+          <a:xfrm>
+            <a:off x="0" y="2084851"/>
+            <a:ext cx="12192000" cy="2404863"/>
+          </a:xfrm>
+        </p:spPr>
+        <p:txBody>
+          <a:bodyPr anchor="ctr">
+            <a:normAutofit/>
+          </a:bodyPr>
+          <a:lstStyle/>
+          <a:p>
+            <a:pPr algn="ctr">
+              <a:buNone/>
+            </a:pPr>
+            <a:r>
+              <a:rPr lang="zh-TW" altLang="en-US" sz="6400" b="1" dirty="0">
+                <a:solidFill>
+                  <a:srgbClr val="000066"/>
+                </a:solidFill>
+                <a:latin typeface="微軟正黑體" pitchFamily="34" charset="-120"/>
+                <a:ea typeface="微軟正黑體" pitchFamily="34" charset="-120"/>
               </a:rPr>
               <a:t>神羔羊配得</a:t>
             </a:r>
-            <a:endParaRPr lang="zh-TW" altLang="en-US" sz="6000" b="1" dirty="0">
-              <a:solidFill>
-                <a:srgbClr val="FF0000"/>
-              </a:solidFill>
-              <a:effectLst>
-                <a:outerShdw blurRad="38100" dist="38100" dir="2700000" algn="tl">
-                  <a:srgbClr val="000000">
-                    <a:alpha val="43137"/>
-                  </a:srgbClr>
-                </a:outerShdw>
-              </a:effectLst>
-            </a:endParaRPr>
-          </a:p>
-        </p:txBody>
-      </p:sp>
-      <p:sp>
-        <p:nvSpPr>
-          <p:cNvPr id="3" name="副標題 2"/>
-          <p:cNvSpPr>
-            <a:spLocks noGrp="1"/>
-          </p:cNvSpPr>
-          <p:nvPr>
-            <p:ph type="subTitle" idx="1"/>
-          </p:nvPr>
+            <a:r>
+              <a:rPr lang="en-US" altLang="zh-TW" sz="6400" b="1" dirty="0">
+                <a:solidFill>
+                  <a:srgbClr val="000066"/>
+                </a:solidFill>
+                <a:latin typeface="微軟正黑體" pitchFamily="34" charset="-120"/>
+                <a:ea typeface="微軟正黑體" pitchFamily="34" charset="-120"/>
+              </a:rPr>
+              <a:t>  </a:t>
+            </a:r>
+            <a:r>
+              <a:rPr lang="zh-TW" altLang="en-US" sz="6400" b="1" dirty="0">
+                <a:solidFill>
+                  <a:srgbClr val="000066"/>
+                </a:solidFill>
+                <a:latin typeface="微軟正黑體" pitchFamily="34" charset="-120"/>
+                <a:ea typeface="微軟正黑體" pitchFamily="34" charset="-120"/>
+              </a:rPr>
+              <a:t>坐在寶座上 </a:t>
+            </a:r>
+          </a:p>
+          <a:p>
+            <a:pPr algn="ctr">
+              <a:buNone/>
+            </a:pPr>
+            <a:r>
+              <a:rPr lang="zh-TW" altLang="en-US" sz="6400" b="1" dirty="0">
+                <a:solidFill>
+                  <a:srgbClr val="000066"/>
+                </a:solidFill>
+                <a:latin typeface="微軟正黑體" pitchFamily="34" charset="-120"/>
+                <a:ea typeface="微軟正黑體" pitchFamily="34" charset="-120"/>
+              </a:rPr>
+              <a:t>頭戴著尊貴冠冕  祢作王到永遠 </a:t>
+            </a:r>
+          </a:p>
+        </p:txBody>
+      </p:sp>
+      <p:sp>
+        <p:nvSpPr>
+          <p:cNvPr id="3" name="TextBox 2">
+            <a:extLst>
+              <a:ext uri="{FF2B5EF4-FFF2-40B4-BE49-F238E27FC236}">
+                <a16:creationId xmlns:a16="http://schemas.microsoft.com/office/drawing/2014/main" id="{B7E63C74-36B6-5313-7F9A-B18D3A279EC6}"/>
+              </a:ext>
+            </a:extLst>
+          </p:cNvPr>
+          <p:cNvSpPr txBox="1"/>
+          <p:nvPr/>
         </p:nvSpPr>
         <p:spPr>
           <a:xfrm>
-            <a:off x="785786" y="2357430"/>
-            <a:ext cx="7858180" cy="3643338"/>
+            <a:off x="0" y="5157193"/>
+            <a:ext cx="12192000" cy="584775"/>
+          </a:xfrm>
+          <a:prstGeom prst="rect">
+            <a:avLst/>
+          </a:prstGeom>
+          <a:noFill/>
+        </p:spPr>
+        <p:txBody>
+          <a:bodyPr wrap="square" rtlCol="0">
+            <a:spAutoFit/>
+          </a:bodyPr>
+          <a:lstStyle/>
+          <a:p>
+            <a:pPr algn="ctr"/>
+            <a:r>
+              <a:rPr lang="en-US" sz="3200" b="1" dirty="0">
+                <a:solidFill>
+                  <a:srgbClr val="000066"/>
+                </a:solidFill>
+                <a:latin typeface="Microsoft JhengHei" panose="020B0604030504040204" pitchFamily="34" charset="-120"/>
+                <a:ea typeface="Microsoft JhengHei" panose="020B0604030504040204" pitchFamily="34" charset="-120"/>
+              </a:rPr>
+              <a:t>( </a:t>
+            </a:r>
+            <a:r>
+              <a:rPr lang="zh-CN" altLang="en-US" sz="3200" b="1" dirty="0">
+                <a:solidFill>
+                  <a:srgbClr val="000066"/>
+                </a:solidFill>
+                <a:latin typeface="Microsoft JhengHei" panose="020B0604030504040204" pitchFamily="34" charset="-120"/>
+                <a:ea typeface="Microsoft JhengHei" panose="020B0604030504040204" pitchFamily="34" charset="-120"/>
+              </a:rPr>
+              <a:t>副歌</a:t>
+            </a:r>
+            <a:r>
+              <a:rPr lang="en-US" sz="3200" b="1" dirty="0">
+                <a:solidFill>
+                  <a:srgbClr val="000066"/>
+                </a:solidFill>
+                <a:latin typeface="Microsoft JhengHei" panose="020B0604030504040204" pitchFamily="34" charset="-120"/>
+                <a:ea typeface="Microsoft JhengHei" panose="020B0604030504040204" pitchFamily="34" charset="-120"/>
+              </a:rPr>
+              <a:t> )</a:t>
+            </a:r>
+            <a:endParaRPr lang="vi-VN" sz="3200" b="1" dirty="0">
+              <a:solidFill>
+                <a:srgbClr val="000066"/>
+              </a:solidFill>
+              <a:ea typeface="Microsoft JhengHei" panose="020B0604030504040204" pitchFamily="34" charset="-120"/>
+            </a:endParaRPr>
+          </a:p>
+        </p:txBody>
+      </p:sp>
+    </p:spTree>
+    <p:extLst>
+      <p:ext uri="{BB962C8B-B14F-4D97-AF65-F5344CB8AC3E}">
+        <p14:creationId xmlns:p14="http://schemas.microsoft.com/office/powerpoint/2010/main" val="1905026789"/>
+      </p:ext>
+    </p:extLst>
+  </p:cSld>
+  <p:clrMapOvr>
+    <a:masterClrMapping/>
+  </p:clrMapOvr>
+</p:sld>
+</file>
+
+<file path=ppt/slides/slide7.xml><?xml version="1.0" encoding="utf-8"?>
+<p:sld xmlns:a="http://schemas.openxmlformats.org/drawingml/2006/main" xmlns:r="http://schemas.openxmlformats.org/officeDocument/2006/relationships" xmlns:p="http://schemas.openxmlformats.org/presentationml/2006/main">
+  <p:cSld>
+    <p:spTree>
+      <p:nvGrpSpPr>
+        <p:cNvPr id="1" name="">
+          <a:extLst>
+            <a:ext uri="{FF2B5EF4-FFF2-40B4-BE49-F238E27FC236}">
+              <a16:creationId xmlns:a16="http://schemas.microsoft.com/office/drawing/2014/main" id="{8359EDEF-232D-62B1-6C07-CAB29FEC94FF}"/>
+            </a:ext>
+          </a:extLst>
+        </p:cNvPr>
+        <p:cNvGrpSpPr/>
+        <p:nvPr/>
+      </p:nvGrpSpPr>
+      <p:grpSpPr>
+        <a:xfrm>
+          <a:off x="0" y="0"/>
+          <a:ext cx="0" cy="0"/>
+          <a:chOff x="0" y="0"/>
+          <a:chExt cx="0" cy="0"/>
+        </a:xfrm>
+      </p:grpSpPr>
+      <p:sp>
+        <p:nvSpPr>
+          <p:cNvPr id="5" name="內容版面配置區 4">
+            <a:extLst>
+              <a:ext uri="{FF2B5EF4-FFF2-40B4-BE49-F238E27FC236}">
+                <a16:creationId xmlns:a16="http://schemas.microsoft.com/office/drawing/2014/main" id="{FD6919C3-DB17-13AD-E92F-E6419C03AA6C}"/>
+              </a:ext>
+            </a:extLst>
+          </p:cNvPr>
+          <p:cNvSpPr>
+            <a:spLocks noGrp="1"/>
+          </p:cNvSpPr>
+          <p:nvPr>
+            <p:ph idx="1"/>
+          </p:nvPr>
+        </p:nvSpPr>
+        <p:spPr>
+          <a:xfrm>
+            <a:off x="0" y="2084851"/>
+            <a:ext cx="12192000" cy="2404863"/>
           </a:xfrm>
         </p:spPr>
         <p:txBody>
-          <a:bodyPr>
-            <a:normAutofit lnSpcReduction="10000"/>
+          <a:bodyPr anchor="ctr">
+            <a:normAutofit/>
           </a:bodyPr>
           <a:lstStyle/>
           <a:p>
-            <a:r>
-              <a:rPr lang="zh-TW" altLang="en-US" sz="4300" b="1" dirty="0" smtClean="0">
-                <a:solidFill>
-                  <a:srgbClr val="FF0000"/>
-                </a:solidFill>
+            <a:pPr algn="ctr">
+              <a:buNone/>
+            </a:pPr>
+            <a:r>
+              <a:rPr lang="zh-TW" altLang="en-US" sz="6400" b="1" dirty="0">
+                <a:solidFill>
+                  <a:srgbClr val="000066"/>
+                </a:solidFill>
+                <a:latin typeface="微軟正黑體" pitchFamily="34" charset="-120"/>
+                <a:ea typeface="微軟正黑體" pitchFamily="34" charset="-120"/>
               </a:rPr>
-              <a:t>來尊崇讚美   </a:t>
-            </a:r>
-            <a:endParaRPr lang="en-US" altLang="zh-TW" sz="4300" b="1" dirty="0" smtClean="0">
-              <a:solidFill>
-                <a:srgbClr val="FF0000"/>
-              </a:solidFill>
-            </a:endParaRPr>
-          </a:p>
-          <a:p>
-            <a:r>
-              <a:rPr lang="zh-TW" altLang="en-US" sz="4300" b="1" dirty="0" smtClean="0">
-                <a:solidFill>
-                  <a:srgbClr val="FF0000"/>
-                </a:solidFill>
-              </a:rPr>
-              <a:t>耶穌神兒子 </a:t>
-            </a:r>
-            <a:endParaRPr lang="en-US" altLang="zh-TW" sz="4300" b="1" dirty="0" smtClean="0">
-              <a:solidFill>
-                <a:srgbClr val="FF0000"/>
-              </a:solidFill>
-            </a:endParaRPr>
-          </a:p>
-          <a:p>
-            <a:r>
-              <a:rPr lang="zh-TW" altLang="en-US" sz="4300" b="1" dirty="0" smtClean="0">
-                <a:solidFill>
-                  <a:srgbClr val="FF0000"/>
-                </a:solidFill>
+              <a:t>來尊崇讚美  耶穌神兒子 </a:t>
+            </a:r>
+          </a:p>
+          <a:p>
+            <a:pPr algn="ctr">
+              <a:buNone/>
+            </a:pPr>
+            <a:r>
+              <a:rPr lang="zh-TW" altLang="en-US" sz="6400" b="1" dirty="0">
+                <a:solidFill>
+                  <a:srgbClr val="000066"/>
+                </a:solidFill>
+                <a:latin typeface="微軟正黑體" pitchFamily="34" charset="-120"/>
+                <a:ea typeface="微軟正黑體" pitchFamily="34" charset="-120"/>
               </a:rPr>
               <a:t>從天降下被釘十架 </a:t>
             </a:r>
-            <a:endParaRPr lang="en-US" altLang="zh-TW" sz="4300" b="1" dirty="0" smtClean="0">
+          </a:p>
+        </p:txBody>
+      </p:sp>
+      <p:sp>
+        <p:nvSpPr>
+          <p:cNvPr id="3" name="TextBox 2">
+            <a:extLst>
+              <a:ext uri="{FF2B5EF4-FFF2-40B4-BE49-F238E27FC236}">
+                <a16:creationId xmlns:a16="http://schemas.microsoft.com/office/drawing/2014/main" id="{EC45F102-1329-5FF4-593A-0A18C0AA2029}"/>
+              </a:ext>
+            </a:extLst>
+          </p:cNvPr>
+          <p:cNvSpPr txBox="1"/>
+          <p:nvPr/>
+        </p:nvSpPr>
+        <p:spPr>
+          <a:xfrm>
+            <a:off x="0" y="5157193"/>
+            <a:ext cx="12192000" cy="584775"/>
+          </a:xfrm>
+          <a:prstGeom prst="rect">
+            <a:avLst/>
+          </a:prstGeom>
+          <a:noFill/>
+        </p:spPr>
+        <p:txBody>
+          <a:bodyPr wrap="square" rtlCol="0">
+            <a:spAutoFit/>
+          </a:bodyPr>
+          <a:lstStyle/>
+          <a:p>
+            <a:pPr algn="ctr"/>
+            <a:r>
+              <a:rPr lang="en-US" sz="3200" b="1" dirty="0">
+                <a:solidFill>
+                  <a:srgbClr val="000066"/>
+                </a:solidFill>
+                <a:latin typeface="Microsoft JhengHei" panose="020B0604030504040204" pitchFamily="34" charset="-120"/>
+                <a:ea typeface="Microsoft JhengHei" panose="020B0604030504040204" pitchFamily="34" charset="-120"/>
+              </a:rPr>
+              <a:t>( </a:t>
+            </a:r>
+            <a:r>
+              <a:rPr lang="zh-CN" altLang="en-US" sz="3200" b="1" dirty="0">
+                <a:solidFill>
+                  <a:srgbClr val="000066"/>
+                </a:solidFill>
+                <a:latin typeface="Microsoft JhengHei" panose="020B0604030504040204" pitchFamily="34" charset="-120"/>
+                <a:ea typeface="Microsoft JhengHei" panose="020B0604030504040204" pitchFamily="34" charset="-120"/>
+              </a:rPr>
+              <a:t>副歌</a:t>
+            </a:r>
+            <a:r>
+              <a:rPr lang="en-US" sz="3200" b="1" dirty="0">
+                <a:solidFill>
+                  <a:srgbClr val="000066"/>
+                </a:solidFill>
+                <a:latin typeface="Microsoft JhengHei" panose="020B0604030504040204" pitchFamily="34" charset="-120"/>
+                <a:ea typeface="Microsoft JhengHei" panose="020B0604030504040204" pitchFamily="34" charset="-120"/>
+              </a:rPr>
+              <a:t> )</a:t>
+            </a:r>
+            <a:endParaRPr lang="vi-VN" sz="3200" b="1" dirty="0">
               <a:solidFill>
-                <a:srgbClr val="FF0000"/>
+                <a:srgbClr val="000066"/>
               </a:solidFill>
+              <a:ea typeface="Microsoft JhengHei" panose="020B0604030504040204" pitchFamily="34" charset="-120"/>
             </a:endParaRPr>
           </a:p>
-          <a:p>
-            <a:r>
-              <a:rPr lang="zh-TW" altLang="en-US" sz="4300" b="1" dirty="0" smtClean="0">
-                <a:solidFill>
-                  <a:srgbClr val="FF0000"/>
-                </a:solidFill>
-              </a:rPr>
-              <a:t>神羔羊配得      </a:t>
-            </a:r>
-            <a:endParaRPr lang="en-US" altLang="zh-TW" sz="4300" b="1" dirty="0" smtClean="0">
-              <a:solidFill>
-                <a:srgbClr val="FF0000"/>
-              </a:solidFill>
-            </a:endParaRPr>
-          </a:p>
-          <a:p>
-            <a:r>
-              <a:rPr lang="zh-TW" altLang="en-US" sz="4300" b="1" dirty="0" smtClean="0">
-                <a:solidFill>
-                  <a:srgbClr val="FF0000"/>
-                </a:solidFill>
+        </p:txBody>
+      </p:sp>
+    </p:spTree>
+    <p:extLst>
+      <p:ext uri="{BB962C8B-B14F-4D97-AF65-F5344CB8AC3E}">
+        <p14:creationId xmlns:p14="http://schemas.microsoft.com/office/powerpoint/2010/main" val="1294720295"/>
+      </p:ext>
+    </p:extLst>
+  </p:cSld>
+  <p:clrMapOvr>
+    <a:masterClrMapping/>
+  </p:clrMapOvr>
+</p:sld>
+</file>
+
+<file path=ppt/slides/slide8.xml><?xml version="1.0" encoding="utf-8"?>
+<p:sld xmlns:a="http://schemas.openxmlformats.org/drawingml/2006/main" xmlns:r="http://schemas.openxmlformats.org/officeDocument/2006/relationships" xmlns:p="http://schemas.openxmlformats.org/presentationml/2006/main">
+  <p:cSld>
+    <p:spTree>
+      <p:nvGrpSpPr>
+        <p:cNvPr id="1" name="">
+          <a:extLst>
+            <a:ext uri="{FF2B5EF4-FFF2-40B4-BE49-F238E27FC236}">
+              <a16:creationId xmlns:a16="http://schemas.microsoft.com/office/drawing/2014/main" id="{F57F6AB8-6F5A-DAAE-81D6-1E576C1FA922}"/>
+            </a:ext>
+          </a:extLst>
+        </p:cNvPr>
+        <p:cNvGrpSpPr/>
+        <p:nvPr/>
+      </p:nvGrpSpPr>
+      <p:grpSpPr>
+        <a:xfrm>
+          <a:off x="0" y="0"/>
+          <a:ext cx="0" cy="0"/>
+          <a:chOff x="0" y="0"/>
+          <a:chExt cx="0" cy="0"/>
+        </a:xfrm>
+      </p:grpSpPr>
+      <p:sp>
+        <p:nvSpPr>
+          <p:cNvPr id="5" name="內容版面配置區 4">
+            <a:extLst>
+              <a:ext uri="{FF2B5EF4-FFF2-40B4-BE49-F238E27FC236}">
+                <a16:creationId xmlns:a16="http://schemas.microsoft.com/office/drawing/2014/main" id="{5C5AD7E6-953A-AC73-245A-ADA264D9722D}"/>
+              </a:ext>
+            </a:extLst>
+          </p:cNvPr>
+          <p:cNvSpPr>
+            <a:spLocks noGrp="1"/>
+          </p:cNvSpPr>
+          <p:nvPr>
+            <p:ph idx="1"/>
+          </p:nvPr>
+        </p:nvSpPr>
+        <p:spPr>
+          <a:xfrm>
+            <a:off x="0" y="2084851"/>
+            <a:ext cx="12192000" cy="2404863"/>
+          </a:xfrm>
+        </p:spPr>
+        <p:txBody>
+          <a:bodyPr anchor="ctr">
+            <a:normAutofit/>
+          </a:bodyPr>
+          <a:lstStyle/>
+          <a:p>
+            <a:pPr algn="ctr">
+              <a:buNone/>
+            </a:pPr>
+            <a:r>
+              <a:rPr lang="zh-TW" altLang="en-US" sz="6400" b="1" dirty="0">
+                <a:solidFill>
+                  <a:srgbClr val="000066"/>
+                </a:solidFill>
+                <a:latin typeface="微軟正黑體" pitchFamily="34" charset="-120"/>
+                <a:ea typeface="微軟正黑體" pitchFamily="34" charset="-120"/>
               </a:rPr>
               <a:t>神羔羊配得</a:t>
             </a:r>
-          </a:p>
-          <a:p>
-            <a:endParaRPr lang="zh-TW" altLang="en-US" b="1" dirty="0">
+            <a:endParaRPr lang="en-US" altLang="zh-TW" sz="6400" b="1" dirty="0">
               <a:solidFill>
-                <a:srgbClr val="FF0000"/>
+                <a:srgbClr val="000066"/>
               </a:solidFill>
+              <a:latin typeface="微軟正黑體" pitchFamily="34" charset="-120"/>
+              <a:ea typeface="微軟正黑體" pitchFamily="34" charset="-120"/>
             </a:endParaRPr>
           </a:p>
+          <a:p>
+            <a:pPr algn="ctr">
+              <a:buNone/>
+            </a:pPr>
+            <a:r>
+              <a:rPr lang="zh-TW" altLang="en-US" sz="6400" b="1" dirty="0">
+                <a:solidFill>
+                  <a:srgbClr val="000066"/>
+                </a:solidFill>
+                <a:latin typeface="微軟正黑體" pitchFamily="34" charset="-120"/>
+                <a:ea typeface="微軟正黑體" pitchFamily="34" charset="-120"/>
+              </a:rPr>
+              <a:t>神羔羊配得</a:t>
+            </a:r>
+          </a:p>
+        </p:txBody>
+      </p:sp>
+      <p:sp>
+        <p:nvSpPr>
+          <p:cNvPr id="3" name="TextBox 2">
+            <a:extLst>
+              <a:ext uri="{FF2B5EF4-FFF2-40B4-BE49-F238E27FC236}">
+                <a16:creationId xmlns:a16="http://schemas.microsoft.com/office/drawing/2014/main" id="{1431E178-1793-F46A-29D0-D08D0C72E9D5}"/>
+              </a:ext>
+            </a:extLst>
+          </p:cNvPr>
+          <p:cNvSpPr txBox="1"/>
+          <p:nvPr/>
+        </p:nvSpPr>
+        <p:spPr>
+          <a:xfrm>
+            <a:off x="0" y="5157193"/>
+            <a:ext cx="12192000" cy="584775"/>
+          </a:xfrm>
+          <a:prstGeom prst="rect">
+            <a:avLst/>
+          </a:prstGeom>
+          <a:noFill/>
+        </p:spPr>
+        <p:txBody>
+          <a:bodyPr wrap="square" rtlCol="0">
+            <a:spAutoFit/>
+          </a:bodyPr>
+          <a:lstStyle/>
+          <a:p>
+            <a:pPr algn="ctr"/>
+            <a:r>
+              <a:rPr lang="en-US" sz="3200" b="1" dirty="0">
+                <a:solidFill>
+                  <a:srgbClr val="000066"/>
+                </a:solidFill>
+                <a:latin typeface="Microsoft JhengHei" panose="020B0604030504040204" pitchFamily="34" charset="-120"/>
+                <a:ea typeface="Microsoft JhengHei" panose="020B0604030504040204" pitchFamily="34" charset="-120"/>
+              </a:rPr>
+              <a:t>( </a:t>
+            </a:r>
+            <a:r>
+              <a:rPr lang="zh-CN" altLang="en-US" sz="3200" b="1" dirty="0">
+                <a:solidFill>
+                  <a:srgbClr val="000066"/>
+                </a:solidFill>
+                <a:latin typeface="Microsoft JhengHei" panose="020B0604030504040204" pitchFamily="34" charset="-120"/>
+                <a:ea typeface="Microsoft JhengHei" panose="020B0604030504040204" pitchFamily="34" charset="-120"/>
+              </a:rPr>
+              <a:t>副歌</a:t>
+            </a:r>
+            <a:r>
+              <a:rPr lang="en-US" sz="3200" b="1" dirty="0">
+                <a:solidFill>
+                  <a:srgbClr val="000066"/>
+                </a:solidFill>
+                <a:latin typeface="Microsoft JhengHei" panose="020B0604030504040204" pitchFamily="34" charset="-120"/>
+                <a:ea typeface="Microsoft JhengHei" panose="020B0604030504040204" pitchFamily="34" charset="-120"/>
+              </a:rPr>
+              <a:t> )</a:t>
+            </a:r>
+            <a:endParaRPr lang="vi-VN" sz="3200" b="1" dirty="0">
+              <a:solidFill>
+                <a:srgbClr val="000066"/>
+              </a:solidFill>
+              <a:ea typeface="Microsoft JhengHei" panose="020B0604030504040204" pitchFamily="34" charset="-120"/>
+            </a:endParaRPr>
+          </a:p>
         </p:txBody>
       </p:sp>
     </p:spTree>
+    <p:extLst>
+      <p:ext uri="{BB962C8B-B14F-4D97-AF65-F5344CB8AC3E}">
+        <p14:creationId xmlns:p14="http://schemas.microsoft.com/office/powerpoint/2010/main" val="1301975838"/>
+      </p:ext>
+    </p:extLst>
   </p:cSld>
   <p:clrMapOvr>
     <a:masterClrMapping/>
@@ -3771,7 +4361,7 @@
 </file>
 
 <file path=ppt/theme/theme1.xml><?xml version="1.0" encoding="utf-8"?>
-<a:theme xmlns:a="http://schemas.openxmlformats.org/drawingml/2006/main" name="Office 佈景主題">
+<a:theme xmlns:a="http://schemas.openxmlformats.org/drawingml/2006/main" name="Theme1">
   <a:themeElements>
     <a:clrScheme name="Office">
       <a:dk1>
@@ -4050,5 +4640,10 @@
   </a:themeElements>
   <a:objectDefaults/>
   <a:extraClrSchemeLst/>
+  <a:extLst>
+    <a:ext uri="{05A4C25C-085E-4340-85A3-A5531E510DB2}">
+      <thm15:themeFamily xmlns:thm15="http://schemas.microsoft.com/office/thememl/2012/main" name="Theme1" id="{75BBF97F-0525-4D7F-ABA1-4CCFA07F43A2}" vid="{8D3552C7-B8E4-422B-9896-C8F00D815D11}"/>
+    </a:ext>
+  </a:extLst>
 </a:theme>
 </file>